--- a/crowdstrike-falcon-api/CrowdStrike_Falcon_Lab_Presentation.pptx
+++ b/crowdstrike-falcon-api/CrowdStrike_Falcon_Lab_Presentation.pptx
@@ -4,9 +4,6 @@
   <p:sldMasterIdLst>
     <p:sldMasterId id="2147483648" r:id="rId1"/>
   </p:sldMasterIdLst>
-  <p:notesMasterIdLst>
-    <p:notesMasterId r:id="rId15"/>
-  </p:notesMasterIdLst>
   <p:sldIdLst>
     <p:sldId id="256" r:id="rId2"/>
     <p:sldId id="257" r:id="rId3"/>
@@ -21,7 +18,11 @@
     <p:sldId id="266" r:id="rId12"/>
     <p:sldId id="267" r:id="rId13"/>
     <p:sldId id="268" r:id="rId14"/>
+    <p:sldId id="269" r:id="rId15"/>
   </p:sldIdLst>
+  <p:notesMasterIdLst>
+    <p:notesMasterId r:id="rId16"/>
+  </p:notesMasterIdLst>
   <p:sldSz cx="12192000" cy="6858000"/>
   <p:notesSz cx="6858000" cy="12192000"/>
   <p:defaultTextStyle>
@@ -116,11 +117,6 @@
       </a:defRPr>
     </a:lvl9pPr>
   </p:defaultTextStyle>
-  <p:extLst>
-    <p:ext uri="{EFAFB233-063F-42B5-8137-9DF3F51BA10A}">
-      <p15:sldGuideLst xmlns:p15="http://schemas.microsoft.com/office/powerpoint/2012/main"/>
-    </p:ext>
-  </p:extLst>
 </p:presentation>
 </file>
 
@@ -146,10 +142,234 @@
           <a:chExt cx="0" cy="0"/>
         </a:xfrm>
       </p:grpSpPr>
+      <p:sp>
+        <p:nvSpPr>
+          <p:cNvPr id="2" name="Header Placeholder 1"/>
+          <p:cNvSpPr>
+            <a:spLocks noGrp="1"/>
+          </p:cNvSpPr>
+          <p:nvPr>
+            <p:ph type="hdr" sz="quarter"/>
+          </p:nvPr>
+        </p:nvSpPr>
+        <p:spPr>
+          <a:xfrm>
+            <a:off x="0" y="0"/>
+            <a:ext cx="2971800" cy="458788"/>
+          </a:xfrm>
+          <a:prstGeom prst="rect">
+            <a:avLst/>
+          </a:prstGeom>
+        </p:spPr>
+        <p:txBody>
+          <a:bodyPr vert="horz" lIns="91440" tIns="45720" rIns="91440" bIns="45720" rtlCol="0"/>
+          <a:lstStyle>
+            <a:lvl1pPr algn="l">
+              <a:defRPr sz="1200"/>
+            </a:lvl1pPr>
+          </a:lstStyle>
+          <a:p>
+            <a:endParaRPr lang="en-US"/>
+          </a:p>
+        </p:txBody>
+      </p:sp>
+      <p:sp>
+        <p:nvSpPr>
+          <p:cNvPr id="3" name="Date Placeholder 2"/>
+          <p:cNvSpPr>
+            <a:spLocks noGrp="1"/>
+          </p:cNvSpPr>
+          <p:nvPr>
+            <p:ph type="dt" idx="1"/>
+          </p:nvPr>
+        </p:nvSpPr>
+        <p:spPr>
+          <a:xfrm>
+            <a:off x="3884613" y="0"/>
+            <a:ext cx="2971800" cy="458788"/>
+          </a:xfrm>
+          <a:prstGeom prst="rect">
+            <a:avLst/>
+          </a:prstGeom>
+        </p:spPr>
+        <p:txBody>
+          <a:bodyPr vert="horz" lIns="91440" tIns="45720" rIns="91440" bIns="45720" rtlCol="0"/>
+          <a:lstStyle>
+            <a:lvl1pPr algn="r">
+              <a:defRPr sz="1200"/>
+            </a:lvl1pPr>
+          </a:lstStyle>
+          <a:p>
+            <a:fld id="{5282F153-3F37-0F45-9E97-73ACFA13230C}" type="datetimeFigureOut">
+              <a:rPr lang="en-US"/>
+              <a:t>7/23/19</a:t>
+            </a:fld>
+            <a:endParaRPr lang="en-US"/>
+          </a:p>
+        </p:txBody>
+      </p:sp>
+      <p:sp>
+        <p:nvSpPr>
+          <p:cNvPr id="4" name="Slide Image Placeholder 3"/>
+          <p:cNvSpPr>
+            <a:spLocks noGrp="1" noRot="1" noChangeAspect="1"/>
+          </p:cNvSpPr>
+          <p:nvPr>
+            <p:ph type="sldImg" idx="2"/>
+          </p:nvPr>
+        </p:nvSpPr>
+        <p:spPr>
+          <a:xfrm>
+            <a:off x="685800" y="1143000"/>
+            <a:ext cx="5486400" cy="3086100"/>
+          </a:xfrm>
+          <a:prstGeom prst="rect">
+            <a:avLst/>
+          </a:prstGeom>
+          <a:noFill/>
+          <a:ln w="12700">
+            <a:solidFill>
+              <a:prstClr val="black"/>
+            </a:solidFill>
+          </a:ln>
+        </p:spPr>
+        <p:txBody>
+          <a:bodyPr vert="horz" lIns="91440" tIns="45720" rIns="91440" bIns="45720" rtlCol="0" anchor="ctr"/>
+          <a:lstStyle/>
+          <a:p>
+            <a:endParaRPr lang="en-US"/>
+          </a:p>
+        </p:txBody>
+      </p:sp>
+      <p:sp>
+        <p:nvSpPr>
+          <p:cNvPr id="5" name="Notes Placeholder 4"/>
+          <p:cNvSpPr>
+            <a:spLocks noGrp="1"/>
+          </p:cNvSpPr>
+          <p:nvPr>
+            <p:ph type="body" sz="quarter" idx="3"/>
+          </p:nvPr>
+        </p:nvSpPr>
+        <p:spPr>
+          <a:xfrm>
+            <a:off x="685800" y="4400550"/>
+            <a:ext cx="5486400" cy="3600450"/>
+          </a:xfrm>
+          <a:prstGeom prst="rect">
+            <a:avLst/>
+          </a:prstGeom>
+        </p:spPr>
+        <p:txBody>
+          <a:bodyPr vert="horz" lIns="91440" tIns="45720" rIns="91440" bIns="45720" rtlCol="0"/>
+          <a:lstStyle/>
+          <a:p>
+            <a:pPr lvl="0"/>
+            <a:r>
+              <a:rPr lang="en-US"/>
+              <a:t>Click to edit Master text styles</a:t>
+            </a:r>
+          </a:p>
+          <a:p>
+            <a:pPr lvl="1"/>
+            <a:r>
+              <a:rPr lang="en-US"/>
+              <a:t>Second level</a:t>
+            </a:r>
+          </a:p>
+          <a:p>
+            <a:pPr lvl="2"/>
+            <a:r>
+              <a:rPr lang="en-US"/>
+              <a:t>Third level</a:t>
+            </a:r>
+          </a:p>
+          <a:p>
+            <a:pPr lvl="3"/>
+            <a:r>
+              <a:rPr lang="en-US"/>
+              <a:t>Fourth level</a:t>
+            </a:r>
+          </a:p>
+          <a:p>
+            <a:pPr lvl="4"/>
+            <a:r>
+              <a:rPr lang="en-US"/>
+              <a:t>Fifth level</a:t>
+            </a:r>
+          </a:p>
+        </p:txBody>
+      </p:sp>
+      <p:sp>
+        <p:nvSpPr>
+          <p:cNvPr id="6" name="Footer Placeholder 5"/>
+          <p:cNvSpPr>
+            <a:spLocks noGrp="1"/>
+          </p:cNvSpPr>
+          <p:nvPr>
+            <p:ph type="ftr" sz="quarter" idx="4"/>
+          </p:nvPr>
+        </p:nvSpPr>
+        <p:spPr>
+          <a:xfrm>
+            <a:off x="0" y="8685213"/>
+            <a:ext cx="2971800" cy="458787"/>
+          </a:xfrm>
+          <a:prstGeom prst="rect">
+            <a:avLst/>
+          </a:prstGeom>
+        </p:spPr>
+        <p:txBody>
+          <a:bodyPr vert="horz" lIns="91440" tIns="45720" rIns="91440" bIns="45720" rtlCol="0" anchor="b"/>
+          <a:lstStyle>
+            <a:lvl1pPr algn="l">
+              <a:defRPr sz="1200"/>
+            </a:lvl1pPr>
+          </a:lstStyle>
+          <a:p>
+            <a:endParaRPr lang="en-US"/>
+          </a:p>
+        </p:txBody>
+      </p:sp>
+      <p:sp>
+        <p:nvSpPr>
+          <p:cNvPr id="7" name="Slide Number Placeholder 6"/>
+          <p:cNvSpPr>
+            <a:spLocks noGrp="1"/>
+          </p:cNvSpPr>
+          <p:nvPr>
+            <p:ph type="sldNum" sz="quarter" idx="5"/>
+          </p:nvPr>
+        </p:nvSpPr>
+        <p:spPr>
+          <a:xfrm>
+            <a:off x="3884613" y="8685213"/>
+            <a:ext cx="2971800" cy="458787"/>
+          </a:xfrm>
+          <a:prstGeom prst="rect">
+            <a:avLst/>
+          </a:prstGeom>
+        </p:spPr>
+        <p:txBody>
+          <a:bodyPr vert="horz" lIns="91440" tIns="45720" rIns="91440" bIns="45720" rtlCol="0" anchor="b"/>
+          <a:lstStyle>
+            <a:lvl1pPr algn="r">
+              <a:defRPr sz="1200"/>
+            </a:lvl1pPr>
+          </a:lstStyle>
+          <a:p>
+            <a:fld id="{CE5E9CC1-C706-0F49-92D6-E571CC5EEA8F}" type="slidenum">
+              <a:rPr lang="en-US"/>
+              <a:t>‹#›</a:t>
+            </a:fld>
+            <a:endParaRPr lang="en-US"/>
+          </a:p>
+        </p:txBody>
+      </p:sp>
     </p:spTree>
     <p:extLst>
       <p:ext uri="{BB962C8B-B14F-4D97-AF65-F5344CB8AC3E}">
-        <p14:creationId xmlns:p14="http://schemas.microsoft.com/office/powerpoint/2010/main" val="3043969484"/>
+        <p14:creationId xmlns:p14="http://schemas.microsoft.com/office/powerpoint/2010/main" val="1024086991"/>
       </p:ext>
     </p:extLst>
   </p:cSld>
@@ -293,6 +513,10 @@
           <a:bodyPr/>
           <a:lstStyle/>
           <a:p>
+            <a:r>
+              <a:rPr lang="en-US" dirty="0"/>
+              <a:t/>
+            </a:r>
             <a:endParaRPr lang="en-US" dirty="0"/>
           </a:p>
         </p:txBody>
@@ -377,6 +601,10 @@
           <a:bodyPr/>
           <a:lstStyle/>
           <a:p>
+            <a:r>
+              <a:rPr lang="en-US" dirty="0"/>
+              <a:t/>
+            </a:r>
             <a:endParaRPr lang="en-US" dirty="0"/>
           </a:p>
         </p:txBody>
@@ -461,6 +689,10 @@
           <a:bodyPr/>
           <a:lstStyle/>
           <a:p>
+            <a:r>
+              <a:rPr lang="en-US" dirty="0"/>
+              <a:t/>
+            </a:r>
             <a:endParaRPr lang="en-US" dirty="0"/>
           </a:p>
         </p:txBody>
@@ -545,6 +777,10 @@
           <a:bodyPr/>
           <a:lstStyle/>
           <a:p>
+            <a:r>
+              <a:rPr lang="en-US" dirty="0"/>
+              <a:t/>
+            </a:r>
             <a:endParaRPr lang="en-US" dirty="0"/>
           </a:p>
         </p:txBody>
@@ -629,6 +865,10 @@
           <a:bodyPr/>
           <a:lstStyle/>
           <a:p>
+            <a:r>
+              <a:rPr lang="en-US" dirty="0"/>
+              <a:t/>
+            </a:r>
             <a:endParaRPr lang="en-US" dirty="0"/>
           </a:p>
         </p:txBody>
@@ -651,6 +891,94 @@
             <a:fld id="{F7021451-1387-4CA6-816F-3879F97B5CBC}" type="slidenum">
               <a:rPr lang="en-US"/>
               <a:t>13</a:t>
+            </a:fld>
+            <a:endParaRPr lang="en-US"/>
+          </a:p>
+        </p:txBody>
+      </p:sp>
+    </p:spTree>
+    <p:extLst>
+      <p:ext uri="{BB962C8B-B14F-4D97-AF65-F5344CB8AC3E}">
+        <p14:creationId xmlns:p14="http://schemas.microsoft.com/office/powerpoint/2010/main" val="1024086991"/>
+      </p:ext>
+    </p:extLst>
+  </p:cSld>
+  <p:clrMapOvr>
+    <a:masterClrMapping/>
+  </p:clrMapOvr>
+</p:notes>
+</file>
+
+<file path=ppt/notesSlides/notesSlide14.xml><?xml version="1.0" encoding="utf-8"?>
+<p:notes xmlns:a="http://schemas.openxmlformats.org/drawingml/2006/main" xmlns:r="http://schemas.openxmlformats.org/officeDocument/2006/relationships" xmlns:p="http://schemas.openxmlformats.org/presentationml/2006/main">
+  <p:cSld>
+    <p:spTree>
+      <p:nvGrpSpPr>
+        <p:cNvPr id="1" name=""/>
+        <p:cNvGrpSpPr/>
+        <p:nvPr/>
+      </p:nvGrpSpPr>
+      <p:grpSpPr>
+        <a:xfrm>
+          <a:off x="0" y="0"/>
+          <a:ext cx="0" cy="0"/>
+          <a:chOff x="0" y="0"/>
+          <a:chExt cx="0" cy="0"/>
+        </a:xfrm>
+      </p:grpSpPr>
+      <p:sp>
+        <p:nvSpPr>
+          <p:cNvPr id="2" name="Slide Image Placeholder 1"/>
+          <p:cNvSpPr>
+            <a:spLocks noGrp="1" noRot="1" noChangeAspect="1"/>
+          </p:cNvSpPr>
+          <p:nvPr>
+            <p:ph type="sldImg"/>
+          </p:nvPr>
+        </p:nvSpPr>
+        <p:spPr/>
+      </p:sp>
+      <p:sp>
+        <p:nvSpPr>
+          <p:cNvPr id="3" name="Notes Placeholder 2"/>
+          <p:cNvSpPr>
+            <a:spLocks noGrp="1"/>
+          </p:cNvSpPr>
+          <p:nvPr>
+            <p:ph type="body" idx="1"/>
+          </p:nvPr>
+        </p:nvSpPr>
+        <p:spPr/>
+        <p:txBody>
+          <a:bodyPr/>
+          <a:lstStyle/>
+          <a:p>
+            <a:r>
+              <a:rPr lang="en-US" dirty="0"/>
+              <a:t/>
+            </a:r>
+            <a:endParaRPr lang="en-US" dirty="0"/>
+          </a:p>
+        </p:txBody>
+      </p:sp>
+      <p:sp>
+        <p:nvSpPr>
+          <p:cNvPr id="4" name="Slide Number Placeholder 3"/>
+          <p:cNvSpPr>
+            <a:spLocks noGrp="1"/>
+          </p:cNvSpPr>
+          <p:nvPr>
+            <p:ph type="sldNum" sz="quarter" idx="10"/>
+          </p:nvPr>
+        </p:nvSpPr>
+        <p:spPr/>
+        <p:txBody>
+          <a:bodyPr/>
+          <a:lstStyle/>
+          <a:p>
+            <a:fld id="{F7021451-1387-4CA6-816F-3879F97B5CBC}" type="slidenum">
+              <a:rPr lang="en-US"/>
+              <a:t>14</a:t>
             </a:fld>
             <a:endParaRPr lang="en-US"/>
           </a:p>
@@ -713,6 +1041,10 @@
           <a:bodyPr/>
           <a:lstStyle/>
           <a:p>
+            <a:r>
+              <a:rPr lang="en-US" dirty="0"/>
+              <a:t/>
+            </a:r>
             <a:endParaRPr lang="en-US" dirty="0"/>
           </a:p>
         </p:txBody>
@@ -797,6 +1129,10 @@
           <a:bodyPr/>
           <a:lstStyle/>
           <a:p>
+            <a:r>
+              <a:rPr lang="en-US" dirty="0"/>
+              <a:t/>
+            </a:r>
             <a:endParaRPr lang="en-US" dirty="0"/>
           </a:p>
         </p:txBody>
@@ -881,6 +1217,10 @@
           <a:bodyPr/>
           <a:lstStyle/>
           <a:p>
+            <a:r>
+              <a:rPr lang="en-US" dirty="0"/>
+              <a:t/>
+            </a:r>
             <a:endParaRPr lang="en-US" dirty="0"/>
           </a:p>
         </p:txBody>
@@ -965,6 +1305,10 @@
           <a:bodyPr/>
           <a:lstStyle/>
           <a:p>
+            <a:r>
+              <a:rPr lang="en-US" dirty="0"/>
+              <a:t/>
+            </a:r>
             <a:endParaRPr lang="en-US" dirty="0"/>
           </a:p>
         </p:txBody>
@@ -1049,6 +1393,10 @@
           <a:bodyPr/>
           <a:lstStyle/>
           <a:p>
+            <a:r>
+              <a:rPr lang="en-US" dirty="0"/>
+              <a:t/>
+            </a:r>
             <a:endParaRPr lang="en-US" dirty="0"/>
           </a:p>
         </p:txBody>
@@ -1133,6 +1481,10 @@
           <a:bodyPr/>
           <a:lstStyle/>
           <a:p>
+            <a:r>
+              <a:rPr lang="en-US" dirty="0"/>
+              <a:t/>
+            </a:r>
             <a:endParaRPr lang="en-US" dirty="0"/>
           </a:p>
         </p:txBody>
@@ -1217,6 +1569,10 @@
           <a:bodyPr/>
           <a:lstStyle/>
           <a:p>
+            <a:r>
+              <a:rPr lang="en-US" dirty="0"/>
+              <a:t/>
+            </a:r>
             <a:endParaRPr lang="en-US" dirty="0"/>
           </a:p>
         </p:txBody>
@@ -1301,6 +1657,10 @@
           <a:bodyPr/>
           <a:lstStyle/>
           <a:p>
+            <a:r>
+              <a:rPr lang="en-US" dirty="0"/>
+              <a:t/>
+            </a:r>
             <a:endParaRPr lang="en-US" dirty="0"/>
           </a:p>
         </p:txBody>
@@ -1374,11 +1734,6 @@
 <file path=ppt/slideMasters/slideMaster1.xml><?xml version="1.0" encoding="utf-8"?>
 <p:sldMaster xmlns:a="http://schemas.openxmlformats.org/drawingml/2006/main" xmlns:r="http://schemas.openxmlformats.org/officeDocument/2006/relationships" xmlns:p="http://schemas.openxmlformats.org/presentationml/2006/main">
   <p:cSld>
-    <p:bg>
-      <p:bgRef idx="1001">
-        <a:schemeClr val="bg1"/>
-      </p:bgRef>
-    </p:bg>
     <p:spTree>
       <p:nvGrpSpPr>
         <p:cNvPr id="1" name=""/>
@@ -1661,7 +2016,6 @@
         <a:solidFill>
           <a:srgbClr val="23303D"/>
         </a:solidFill>
-        <a:effectLst/>
       </p:bgPr>
     </p:bg>
     <p:spTree>
@@ -1697,13 +2051,6 @@
           </a:solidFill>
           <a:ln/>
         </p:spPr>
-        <p:txBody>
-          <a:bodyPr/>
-          <a:lstStyle/>
-          <a:p>
-            <a:endParaRPr lang="en-NZ"/>
-          </a:p>
-        </p:txBody>
       </p:sp>
       <p:sp>
         <p:nvSpPr>
@@ -1724,13 +2071,6 @@
           </a:solidFill>
           <a:ln/>
         </p:spPr>
-        <p:txBody>
-          <a:bodyPr/>
-          <a:lstStyle/>
-          <a:p>
-            <a:endParaRPr lang="en-NZ"/>
-          </a:p>
-        </p:txBody>
       </p:sp>
       <p:sp>
         <p:nvSpPr>
@@ -1753,11 +2093,11 @@
           <a:bodyPr wrap="square" rtlCol="0" anchor="ctr"/>
           <a:lstStyle/>
           <a:p>
-            <a:pPr marL="0" indent="0">
-              <a:buNone/>
-            </a:pPr>
-            <a:r>
-              <a:rPr lang="en-US" sz="1300" b="1" kern="0" spc="200" dirty="0">
+            <a:pPr indent="0" marL="0">
+              <a:buNone/>
+            </a:pPr>
+            <a:r>
+              <a:rPr lang="en-US" sz="1300" b="1" spc="200" kern="0" dirty="0">
                 <a:solidFill>
                   <a:srgbClr val="00B4D8"/>
                 </a:solidFill>
@@ -1792,7 +2132,7 @@
           <a:bodyPr wrap="square" rtlCol="0" anchor="ctr"/>
           <a:lstStyle/>
           <a:p>
-            <a:pPr marL="0" indent="0">
+            <a:pPr indent="0" marL="0">
               <a:lnSpc>
                 <a:spcPct val="105000"/>
               </a:lnSpc>
@@ -1812,7 +2152,7 @@
             <a:endParaRPr lang="en-US" sz="4000" dirty="0"/>
           </a:p>
           <a:p>
-            <a:pPr marL="0" indent="0">
+            <a:pPr indent="0" marL="0">
               <a:lnSpc>
                 <a:spcPct val="105000"/>
               </a:lnSpc>
@@ -1854,7 +2194,7 @@
           <a:bodyPr wrap="square" rtlCol="0" anchor="ctr"/>
           <a:lstStyle/>
           <a:p>
-            <a:pPr marL="0" indent="0">
+            <a:pPr indent="0" marL="0">
               <a:buNone/>
             </a:pPr>
             <a:r>
@@ -1894,13 +2234,6 @@
             <a:prstDash val="solid"/>
           </a:ln>
         </p:spPr>
-        <p:txBody>
-          <a:bodyPr/>
-          <a:lstStyle/>
-          <a:p>
-            <a:endParaRPr lang="en-NZ"/>
-          </a:p>
-        </p:txBody>
       </p:sp>
       <p:sp>
         <p:nvSpPr>
@@ -1923,7 +2256,7 @@
           <a:bodyPr wrap="square" rtlCol="0" anchor="ctr"/>
           <a:lstStyle/>
           <a:p>
-            <a:pPr marL="0" indent="0">
+            <a:pPr indent="0" marL="0">
               <a:buNone/>
             </a:pPr>
             <a:r>
@@ -1962,7 +2295,7 @@
           <a:bodyPr wrap="square" rtlCol="0" anchor="ctr"/>
           <a:lstStyle/>
           <a:p>
-            <a:pPr marL="0" indent="0">
+            <a:pPr indent="0" marL="0">
               <a:buNone/>
             </a:pPr>
             <a:r>
@@ -1996,7 +2329,6 @@
         <a:solidFill>
           <a:srgbClr val="FFFFFF"/>
         </a:solidFill>
-        <a:effectLst/>
       </p:bgPr>
     </p:bg>
     <p:spTree>
@@ -2032,13 +2364,6 @@
           </a:solidFill>
           <a:ln/>
         </p:spPr>
-        <p:txBody>
-          <a:bodyPr/>
-          <a:lstStyle/>
-          <a:p>
-            <a:endParaRPr lang="en-NZ"/>
-          </a:p>
-        </p:txBody>
       </p:sp>
       <p:sp>
         <p:nvSpPr>
@@ -2061,7 +2386,7 @@
           <a:bodyPr wrap="square" lIns="0" tIns="0" rIns="0" bIns="0" rtlCol="0" anchor="ctr"/>
           <a:lstStyle/>
           <a:p>
-            <a:pPr marL="0" indent="0" algn="ctr">
+            <a:pPr algn="ctr" indent="0" marL="0">
               <a:buNone/>
             </a:pPr>
             <a:r>
@@ -2100,11 +2425,11 @@
           <a:bodyPr wrap="square" rtlCol="0" anchor="ctr"/>
           <a:lstStyle/>
           <a:p>
-            <a:pPr marL="0" indent="0">
-              <a:buNone/>
-            </a:pPr>
-            <a:r>
-              <a:rPr lang="en-US" sz="1200" b="1" kern="0" spc="200" dirty="0">
+            <a:pPr indent="0" marL="0">
+              <a:buNone/>
+            </a:pPr>
+            <a:r>
+              <a:rPr lang="en-US" sz="1200" b="1" spc="200" kern="0" dirty="0">
                 <a:solidFill>
                   <a:srgbClr val="00B4D8"/>
                 </a:solidFill>
@@ -2139,7 +2464,7 @@
           <a:bodyPr wrap="square" rtlCol="0" anchor="ctr"/>
           <a:lstStyle/>
           <a:p>
-            <a:pPr marL="0" indent="0">
+            <a:pPr indent="0" marL="0">
               <a:buNone/>
             </a:pPr>
             <a:r>
@@ -2268,31 +2593,24 @@
             <a:prstDash val="solid"/>
           </a:ln>
           <a:effectLst>
-            <a:outerShdw blurRad="101600" dist="38100" dir="5400000" algn="bl" rotWithShape="0">
+            <a:outerShdw sx="100000" sy="100000" kx="0" ky="0" algn="bl" rotWithShape="0" blurRad="101600" dist="38100" dir="5400000">
               <a:srgbClr val="000000">
                 <a:alpha val="18000"/>
               </a:srgbClr>
             </a:outerShdw>
           </a:effectLst>
         </p:spPr>
-        <p:txBody>
-          <a:bodyPr/>
-          <a:lstStyle/>
-          <a:p>
-            <a:endParaRPr lang="en-NZ"/>
-          </a:p>
-        </p:txBody>
       </p:sp>
       <p:pic>
         <p:nvPicPr>
-          <p:cNvPr id="8" name="Image 0" descr="/home/claude/crowdstrike_pptx/img/07_console_17_detections.png"/>
+          <p:cNvPr id="8" name="Image 0" descr="/home/claude/crowdstrike_pptx/img/07_console_17_detections.png">    </p:cNvPr>
           <p:cNvPicPr>
             <a:picLocks noChangeAspect="1"/>
           </p:cNvPicPr>
           <p:nvPr/>
         </p:nvPicPr>
         <p:blipFill>
-          <a:blip r:embed="rId3"/>
+          <a:blip r:embed="rId1"/>
           <a:stretch>
             <a:fillRect/>
           </a:stretch>
@@ -2323,7 +2641,6 @@
         <a:solidFill>
           <a:srgbClr val="FFFFFF"/>
         </a:solidFill>
-        <a:effectLst/>
       </p:bgPr>
     </p:bg>
     <p:spTree>
@@ -2359,13 +2676,6 @@
           </a:solidFill>
           <a:ln/>
         </p:spPr>
-        <p:txBody>
-          <a:bodyPr/>
-          <a:lstStyle/>
-          <a:p>
-            <a:endParaRPr lang="en-NZ"/>
-          </a:p>
-        </p:txBody>
       </p:sp>
       <p:sp>
         <p:nvSpPr>
@@ -2388,7 +2698,7 @@
           <a:bodyPr wrap="square" lIns="0" tIns="0" rIns="0" bIns="0" rtlCol="0" anchor="ctr"/>
           <a:lstStyle/>
           <a:p>
-            <a:pPr marL="0" indent="0" algn="ctr">
+            <a:pPr algn="ctr" indent="0" marL="0">
               <a:buNone/>
             </a:pPr>
             <a:r>
@@ -2427,11 +2737,11 @@
           <a:bodyPr wrap="square" rtlCol="0" anchor="ctr"/>
           <a:lstStyle/>
           <a:p>
-            <a:pPr marL="0" indent="0">
-              <a:buNone/>
-            </a:pPr>
-            <a:r>
-              <a:rPr lang="en-US" sz="1200" b="1" kern="0" spc="200" dirty="0">
+            <a:pPr indent="0" marL="0">
+              <a:buNone/>
+            </a:pPr>
+            <a:r>
+              <a:rPr lang="en-US" sz="1200" b="1" spc="200" kern="0" dirty="0">
                 <a:solidFill>
                   <a:srgbClr val="00B4D8"/>
                 </a:solidFill>
@@ -2466,7 +2776,7 @@
           <a:bodyPr wrap="square" rtlCol="0" anchor="ctr"/>
           <a:lstStyle/>
           <a:p>
-            <a:pPr marL="0" indent="0">
+            <a:pPr indent="0" marL="0">
               <a:buNone/>
             </a:pPr>
             <a:r>
@@ -2548,7 +2858,7 @@
           <a:bodyPr wrap="square" rtlCol="0" anchor="ctr"/>
           <a:lstStyle/>
           <a:p>
-            <a:pPr marL="0" indent="0">
+            <a:pPr indent="0" marL="0">
               <a:buNone/>
             </a:pPr>
             <a:r>
@@ -2592,31 +2902,24 @@
             <a:prstDash val="solid"/>
           </a:ln>
           <a:effectLst>
-            <a:outerShdw blurRad="101600" dist="38100" dir="5400000" algn="bl" rotWithShape="0">
+            <a:outerShdw sx="100000" sy="100000" kx="0" ky="0" algn="bl" rotWithShape="0" blurRad="101600" dist="38100" dir="5400000">
               <a:srgbClr val="000000">
                 <a:alpha val="18000"/>
               </a:srgbClr>
             </a:outerShdw>
           </a:effectLst>
         </p:spPr>
-        <p:txBody>
-          <a:bodyPr/>
-          <a:lstStyle/>
-          <a:p>
-            <a:endParaRPr lang="en-NZ"/>
-          </a:p>
-        </p:txBody>
       </p:sp>
       <p:pic>
         <p:nvPicPr>
-          <p:cNvPr id="9" name="Image 0" descr="/home/claude/crowdstrike_pptx/img/08_error_400_param.png"/>
+          <p:cNvPr id="9" name="Image 0" descr="/home/claude/crowdstrike_pptx/img/08_error_400_param.png">    </p:cNvPr>
           <p:cNvPicPr>
             <a:picLocks noChangeAspect="1"/>
           </p:cNvPicPr>
           <p:nvPr/>
         </p:nvPicPr>
         <p:blipFill>
-          <a:blip r:embed="rId3"/>
+          <a:blip r:embed="rId1"/>
           <a:stretch>
             <a:fillRect/>
           </a:stretch>
@@ -2652,7 +2955,7 @@
           <a:bodyPr wrap="square" rtlCol="0" anchor="ctr"/>
           <a:lstStyle/>
           <a:p>
-            <a:pPr marL="0" indent="0">
+            <a:pPr indent="0" marL="0">
               <a:buNone/>
             </a:pPr>
             <a:r>
@@ -2696,31 +2999,24 @@
             <a:prstDash val="solid"/>
           </a:ln>
           <a:effectLst>
-            <a:outerShdw blurRad="101600" dist="38100" dir="5400000" algn="bl" rotWithShape="0">
+            <a:outerShdw sx="100000" sy="100000" kx="0" ky="0" algn="bl" rotWithShape="0" blurRad="101600" dist="38100" dir="5400000">
               <a:srgbClr val="000000">
                 <a:alpha val="18000"/>
               </a:srgbClr>
             </a:outerShdw>
           </a:effectLst>
         </p:spPr>
-        <p:txBody>
-          <a:bodyPr/>
-          <a:lstStyle/>
-          <a:p>
-            <a:endParaRPr lang="en-NZ"/>
-          </a:p>
-        </p:txBody>
       </p:sp>
       <p:pic>
         <p:nvPicPr>
-          <p:cNvPr id="12" name="Image 1" descr="/home/claude/crowdstrike_pptx/img/09_error_400_status.png"/>
+          <p:cNvPr id="12" name="Image 1" descr="/home/claude/crowdstrike_pptx/img/09_error_400_status.png">    </p:cNvPr>
           <p:cNvPicPr>
             <a:picLocks noChangeAspect="1"/>
           </p:cNvPicPr>
           <p:nvPr/>
         </p:nvPicPr>
         <p:blipFill>
-          <a:blip r:embed="rId4"/>
+          <a:blip r:embed="rId2"/>
           <a:stretch>
             <a:fillRect/>
           </a:stretch>
@@ -2751,7 +3047,6 @@
         <a:solidFill>
           <a:srgbClr val="FFFFFF"/>
         </a:solidFill>
-        <a:effectLst/>
       </p:bgPr>
     </p:bg>
     <p:spTree>
@@ -2787,13 +3082,6 @@
           </a:solidFill>
           <a:ln/>
         </p:spPr>
-        <p:txBody>
-          <a:bodyPr/>
-          <a:lstStyle/>
-          <a:p>
-            <a:endParaRPr lang="en-NZ"/>
-          </a:p>
-        </p:txBody>
       </p:sp>
       <p:sp>
         <p:nvSpPr>
@@ -2816,7 +3104,7 @@
           <a:bodyPr wrap="square" lIns="0" tIns="0" rIns="0" bIns="0" rtlCol="0" anchor="ctr"/>
           <a:lstStyle/>
           <a:p>
-            <a:pPr marL="0" indent="0" algn="ctr">
+            <a:pPr algn="ctr" indent="0" marL="0">
               <a:buNone/>
             </a:pPr>
             <a:r>
@@ -2855,11 +3143,11 @@
           <a:bodyPr wrap="square" rtlCol="0" anchor="ctr"/>
           <a:lstStyle/>
           <a:p>
-            <a:pPr marL="0" indent="0">
-              <a:buNone/>
-            </a:pPr>
-            <a:r>
-              <a:rPr lang="en-US" sz="1200" b="1" kern="0" spc="200" dirty="0">
+            <a:pPr indent="0" marL="0">
+              <a:buNone/>
+            </a:pPr>
+            <a:r>
+              <a:rPr lang="en-US" sz="1200" b="1" spc="200" kern="0" dirty="0">
                 <a:solidFill>
                   <a:srgbClr val="00B4D8"/>
                 </a:solidFill>
@@ -2894,7 +3182,7 @@
           <a:bodyPr wrap="square" rtlCol="0" anchor="ctr"/>
           <a:lstStyle/>
           <a:p>
-            <a:pPr marL="0" indent="0">
+            <a:pPr indent="0" marL="0">
               <a:buNone/>
             </a:pPr>
             <a:r>
@@ -2981,31 +3269,24 @@
             <a:prstDash val="solid"/>
           </a:ln>
           <a:effectLst>
-            <a:outerShdw blurRad="101600" dist="38100" dir="5400000" algn="bl" rotWithShape="0">
+            <a:outerShdw sx="100000" sy="100000" kx="0" ky="0" algn="bl" rotWithShape="0" blurRad="101600" dist="38100" dir="5400000">
               <a:srgbClr val="000000">
                 <a:alpha val="18000"/>
               </a:srgbClr>
             </a:outerShdw>
           </a:effectLst>
         </p:spPr>
-        <p:txBody>
-          <a:bodyPr/>
-          <a:lstStyle/>
-          <a:p>
-            <a:endParaRPr lang="en-NZ"/>
-          </a:p>
-        </p:txBody>
       </p:sp>
       <p:pic>
         <p:nvPicPr>
-          <p:cNvPr id="8" name="Image 0" descr="/home/claude/crowdstrike_pptx/img/10_triage_success.png"/>
+          <p:cNvPr id="8" name="Image 0" descr="/home/claude/crowdstrike_pptx/img/10_triage_success.png">    </p:cNvPr>
           <p:cNvPicPr>
             <a:picLocks noChangeAspect="1"/>
           </p:cNvPicPr>
           <p:nvPr/>
         </p:nvPicPr>
         <p:blipFill>
-          <a:blip r:embed="rId3"/>
+          <a:blip r:embed="rId1"/>
           <a:stretch>
             <a:fillRect/>
           </a:stretch>
@@ -3041,7 +3322,7 @@
           <a:bodyPr wrap="square" rtlCol="0" anchor="ctr"/>
           <a:lstStyle/>
           <a:p>
-            <a:pPr marL="0" indent="0" algn="ctr">
+            <a:pPr algn="ctr" indent="0" marL="0">
               <a:buNone/>
             </a:pPr>
             <a:r>
@@ -3073,9 +3354,8 @@
     <p:bg>
       <p:bgPr>
         <a:solidFill>
-          <a:srgbClr val="23303D"/>
+          <a:srgbClr val="FFFFFF"/>
         </a:solidFill>
-        <a:effectLst/>
       </p:bgPr>
     </p:bg>
     <p:spTree>
@@ -3100,6 +3380,318 @@
         </p:nvSpPr>
         <p:spPr>
           <a:xfrm>
+            <a:off x="548640" y="502920"/>
+            <a:ext cx="502920" cy="502920"/>
+          </a:xfrm>
+          <a:prstGeom prst="ellipse">
+            <a:avLst/>
+          </a:prstGeom>
+          <a:solidFill>
+            <a:srgbClr val="00B4D8"/>
+          </a:solidFill>
+          <a:ln/>
+        </p:spPr>
+      </p:sp>
+      <p:sp>
+        <p:nvSpPr>
+          <p:cNvPr id="3" name="Text 1"/>
+          <p:cNvSpPr/>
+          <p:nvPr/>
+        </p:nvSpPr>
+        <p:spPr>
+          <a:xfrm>
+            <a:off x="548640" y="502920"/>
+            <a:ext cx="502920" cy="502920"/>
+          </a:xfrm>
+          <a:prstGeom prst="rect">
+            <a:avLst/>
+          </a:prstGeom>
+          <a:noFill/>
+          <a:ln/>
+        </p:spPr>
+        <p:txBody>
+          <a:bodyPr wrap="square" lIns="0" tIns="0" rIns="0" bIns="0" rtlCol="0" anchor="ctr"/>
+          <a:lstStyle/>
+          <a:p>
+            <a:pPr algn="ctr" indent="0" marL="0">
+              <a:buNone/>
+            </a:pPr>
+            <a:r>
+              <a:rPr lang="en-US" sz="1600" b="1" dirty="0">
+                <a:solidFill>
+                  <a:srgbClr val="FFFFFF"/>
+                </a:solidFill>
+                <a:latin typeface="Calibri" pitchFamily="34" charset="0"/>
+                <a:ea typeface="Calibri" pitchFamily="34" charset="-122"/>
+                <a:cs typeface="Calibri" pitchFamily="34" charset="-120"/>
+              </a:rPr>
+              <a:t>10</a:t>
+            </a:r>
+            <a:endParaRPr lang="en-US" sz="1600" dirty="0"/>
+          </a:p>
+        </p:txBody>
+      </p:sp>
+      <p:sp>
+        <p:nvSpPr>
+          <p:cNvPr id="4" name="Text 2"/>
+          <p:cNvSpPr/>
+          <p:nvPr/>
+        </p:nvSpPr>
+        <p:spPr>
+          <a:xfrm>
+            <a:off x="1207008" y="530352"/>
+            <a:ext cx="10405872" cy="256032"/>
+          </a:xfrm>
+          <a:prstGeom prst="rect">
+            <a:avLst/>
+          </a:prstGeom>
+          <a:noFill/>
+          <a:ln/>
+        </p:spPr>
+        <p:txBody>
+          <a:bodyPr wrap="square" rtlCol="0" anchor="ctr"/>
+          <a:lstStyle/>
+          <a:p>
+            <a:pPr indent="0" marL="0">
+              <a:buNone/>
+            </a:pPr>
+            <a:r>
+              <a:rPr lang="en-US" sz="1200" b="1" spc="200" kern="0" dirty="0">
+                <a:solidFill>
+                  <a:srgbClr val="00B4D8"/>
+                </a:solidFill>
+                <a:latin typeface="Calibri" pitchFamily="34" charset="0"/>
+                <a:ea typeface="Calibri" pitchFamily="34" charset="-122"/>
+                <a:cs typeface="Calibri" pitchFamily="34" charset="-120"/>
+              </a:rPr>
+              <a:t>GOING FURTHER</a:t>
+            </a:r>
+            <a:endParaRPr lang="en-US" sz="1200" dirty="0"/>
+          </a:p>
+        </p:txBody>
+      </p:sp>
+      <p:sp>
+        <p:nvSpPr>
+          <p:cNvPr id="5" name="Text 3"/>
+          <p:cNvSpPr/>
+          <p:nvPr/>
+        </p:nvSpPr>
+        <p:spPr>
+          <a:xfrm>
+            <a:off x="1207008" y="777240"/>
+            <a:ext cx="10405872" cy="548640"/>
+          </a:xfrm>
+          <a:prstGeom prst="rect">
+            <a:avLst/>
+          </a:prstGeom>
+          <a:noFill/>
+          <a:ln/>
+        </p:spPr>
+        <p:txBody>
+          <a:bodyPr wrap="square" rtlCol="0" anchor="ctr"/>
+          <a:lstStyle/>
+          <a:p>
+            <a:pPr indent="0" marL="0">
+              <a:buNone/>
+            </a:pPr>
+            <a:r>
+              <a:rPr lang="en-US" sz="2000" b="1" dirty="0">
+                <a:solidFill>
+                  <a:srgbClr val="23303D"/>
+                </a:solidFill>
+                <a:latin typeface="Calibri" pitchFamily="34" charset="0"/>
+                <a:ea typeface="Calibri" pitchFamily="34" charset="-122"/>
+                <a:cs typeface="Calibri" pitchFamily="34" charset="-120"/>
+              </a:rPr>
+              <a:t>Testing Across Multiple Tactics</a:t>
+            </a:r>
+            <a:endParaRPr lang="en-US" sz="2000" dirty="0"/>
+          </a:p>
+        </p:txBody>
+      </p:sp>
+      <p:sp>
+        <p:nvSpPr>
+          <p:cNvPr id="6" name="Text 4"/>
+          <p:cNvSpPr/>
+          <p:nvPr/>
+        </p:nvSpPr>
+        <p:spPr>
+          <a:xfrm>
+            <a:off x="548640" y="1600200"/>
+            <a:ext cx="11064240" cy="1737360"/>
+          </a:xfrm>
+          <a:prstGeom prst="rect">
+            <a:avLst/>
+          </a:prstGeom>
+          <a:noFill/>
+          <a:ln/>
+        </p:spPr>
+        <p:txBody>
+          <a:bodyPr wrap="square" rtlCol="0" anchor="t"/>
+          <a:lstStyle/>
+          <a:p>
+            <a:pPr marL="228600" indent="-228600">
+              <a:spcAft>
+                <a:spcPts val="1200"/>
+              </a:spcAft>
+              <a:buSzPct val="100000"/>
+              <a:buChar char="•"/>
+            </a:pPr>
+            <a:r>
+              <a:rPr lang="en-US" sz="1350" dirty="0">
+                <a:solidFill>
+                  <a:srgbClr val="5B6570"/>
+                </a:solidFill>
+                <a:latin typeface="Calibri" pitchFamily="34" charset="0"/>
+                <a:ea typeface="Calibri" pitchFamily="34" charset="-122"/>
+                <a:cs typeface="Calibri" pitchFamily="34" charset="-120"/>
+              </a:rPr>
+              <a:t>Ran two more Atomic Red Team techniques, covering different MITRE tactics than the original test</a:t>
+            </a:r>
+            <a:endParaRPr lang="en-US" sz="1350" dirty="0"/>
+          </a:p>
+          <a:p>
+            <a:pPr marL="228600" indent="-228600">
+              <a:spcAft>
+                <a:spcPts val="1200"/>
+              </a:spcAft>
+              <a:buSzPct val="100000"/>
+              <a:buChar char="•"/>
+            </a:pPr>
+            <a:r>
+              <a:rPr lang="en-US" sz="1350" dirty="0">
+                <a:solidFill>
+                  <a:srgbClr val="5B6570"/>
+                </a:solidFill>
+                <a:latin typeface="Calibri" pitchFamily="34" charset="0"/>
+                <a:ea typeface="Calibri" pitchFamily="34" charset="-122"/>
+                <a:cs typeface="Calibri" pitchFamily="34" charset="-120"/>
+              </a:rPr>
+              <a:t>T1082 (Discovery): ran cleanly, no alert — expected, since a native systeminfo command alone isn't distinct enough to flag</a:t>
+            </a:r>
+            <a:endParaRPr lang="en-US" sz="1350" dirty="0"/>
+          </a:p>
+          <a:p>
+            <a:pPr marL="228600" indent="-228600">
+              <a:spcAft>
+                <a:spcPts val="1200"/>
+              </a:spcAft>
+              <a:buSzPct val="100000"/>
+              <a:buChar char="•"/>
+            </a:pPr>
+            <a:r>
+              <a:rPr lang="en-US" sz="1350" dirty="0">
+                <a:solidFill>
+                  <a:srgbClr val="5B6570"/>
+                </a:solidFill>
+                <a:latin typeface="Calibri" pitchFamily="34" charset="0"/>
+                <a:ea typeface="Calibri" pitchFamily="34" charset="-122"/>
+                <a:cs typeface="Calibri" pitchFamily="34" charset="-120"/>
+              </a:rPr>
+              <a:t>T1112 (Defense Evasion): blocked by Falcon's prevention layer AND still generated a High severity alert — prevention and detection working together, not just one or the other</a:t>
+            </a:r>
+            <a:endParaRPr lang="en-US" sz="1350" dirty="0"/>
+          </a:p>
+        </p:txBody>
+      </p:sp>
+      <p:sp>
+        <p:nvSpPr>
+          <p:cNvPr id="7" name="Shape 5"/>
+          <p:cNvSpPr/>
+          <p:nvPr/>
+        </p:nvSpPr>
+        <p:spPr>
+          <a:xfrm>
+            <a:off x="2704054" y="3355848"/>
+            <a:ext cx="6753413" cy="2980944"/>
+          </a:xfrm>
+          <a:prstGeom prst="roundRect">
+            <a:avLst>
+              <a:gd name="adj" fmla="val 1534"/>
+            </a:avLst>
+          </a:prstGeom>
+          <a:solidFill>
+            <a:srgbClr val="23303D"/>
+          </a:solidFill>
+          <a:ln w="12700">
+            <a:solidFill>
+              <a:srgbClr val="23303D"/>
+            </a:solidFill>
+            <a:prstDash val="solid"/>
+          </a:ln>
+          <a:effectLst>
+            <a:outerShdw sx="100000" sy="100000" kx="0" ky="0" algn="bl" rotWithShape="0" blurRad="101600" dist="38100" dir="5400000">
+              <a:srgbClr val="000000">
+                <a:alpha val="18000"/>
+              </a:srgbClr>
+            </a:outerShdw>
+          </a:effectLst>
+        </p:spPr>
+      </p:sp>
+      <p:pic>
+        <p:nvPicPr>
+          <p:cNvPr id="8" name="Image 0" descr="/home/claude/crowdstrike_pptx/img/12_multi_tactic_results.png">    </p:cNvPr>
+          <p:cNvPicPr>
+            <a:picLocks noChangeAspect="1"/>
+          </p:cNvPicPr>
+          <p:nvPr/>
+        </p:nvPicPr>
+        <p:blipFill>
+          <a:blip r:embed="rId1"/>
+          <a:stretch>
+            <a:fillRect/>
+          </a:stretch>
+        </p:blipFill>
+        <p:spPr>
+          <a:xfrm>
+            <a:off x="2777206" y="3429000"/>
+            <a:ext cx="6607109" cy="2834640"/>
+          </a:xfrm>
+          <a:prstGeom prst="rect">
+            <a:avLst/>
+          </a:prstGeom>
+        </p:spPr>
+      </p:pic>
+    </p:spTree>
+  </p:cSld>
+  <p:clrMapOvr>
+    <a:masterClrMapping/>
+  </p:clrMapOvr>
+</p:sld>
+</file>
+
+<file path=ppt/slides/slide14.xml><?xml version="1.0" encoding="utf-8"?>
+<p:sld xmlns:a="http://schemas.openxmlformats.org/drawingml/2006/main" xmlns:r="http://schemas.openxmlformats.org/officeDocument/2006/relationships" xmlns:p="http://schemas.openxmlformats.org/presentationml/2006/main">
+  <p:cSld name="Slide 14">
+    <p:bg>
+      <p:bgPr>
+        <a:solidFill>
+          <a:srgbClr val="23303D"/>
+        </a:solidFill>
+      </p:bgPr>
+    </p:bg>
+    <p:spTree>
+      <p:nvGrpSpPr>
+        <p:cNvPr id="1" name=""/>
+        <p:cNvGrpSpPr/>
+        <p:nvPr/>
+      </p:nvGrpSpPr>
+      <p:grpSpPr>
+        <a:xfrm>
+          <a:off x="0" y="0"/>
+          <a:ext cx="0" cy="0"/>
+          <a:chOff x="0" y="0"/>
+          <a:chExt cx="0" cy="0"/>
+        </a:xfrm>
+      </p:grpSpPr>
+      <p:sp>
+        <p:nvSpPr>
+          <p:cNvPr id="2" name="Shape 0"/>
+          <p:cNvSpPr/>
+          <p:nvPr/>
+        </p:nvSpPr>
+        <p:spPr>
+          <a:xfrm>
             <a:off x="-1645920" y="-1645920"/>
             <a:ext cx="3840480" cy="3840480"/>
           </a:xfrm>
@@ -3111,13 +3703,6 @@
           </a:solidFill>
           <a:ln/>
         </p:spPr>
-        <p:txBody>
-          <a:bodyPr/>
-          <a:lstStyle/>
-          <a:p>
-            <a:endParaRPr lang="en-NZ"/>
-          </a:p>
-        </p:txBody>
       </p:sp>
       <p:sp>
         <p:nvSpPr>
@@ -3140,11 +3725,11 @@
           <a:bodyPr wrap="square" rtlCol="0" anchor="ctr"/>
           <a:lstStyle/>
           <a:p>
-            <a:pPr marL="0" indent="0">
-              <a:buNone/>
-            </a:pPr>
-            <a:r>
-              <a:rPr lang="en-US" sz="1300" b="1" kern="0" spc="200" dirty="0">
+            <a:pPr indent="0" marL="0">
+              <a:buNone/>
+            </a:pPr>
+            <a:r>
+              <a:rPr lang="en-US" sz="1300" b="1" spc="200" kern="0" dirty="0">
                 <a:solidFill>
                   <a:srgbClr val="00B4D8"/>
                 </a:solidFill>
@@ -3179,7 +3764,7 @@
           <a:bodyPr wrap="square" rtlCol="0" anchor="ctr"/>
           <a:lstStyle/>
           <a:p>
-            <a:pPr marL="0" indent="0">
+            <a:pPr indent="0" marL="0">
               <a:buNone/>
             </a:pPr>
             <a:r>
@@ -3216,13 +3801,6 @@
           </a:solidFill>
           <a:ln/>
         </p:spPr>
-        <p:txBody>
-          <a:bodyPr/>
-          <a:lstStyle/>
-          <a:p>
-            <a:endParaRPr lang="en-NZ"/>
-          </a:p>
-        </p:txBody>
       </p:sp>
       <p:sp>
         <p:nvSpPr>
@@ -3245,7 +3823,7 @@
           <a:bodyPr wrap="square" rtlCol="0" anchor="ctr"/>
           <a:lstStyle/>
           <a:p>
-            <a:pPr marL="0" indent="0">
+            <a:pPr indent="0" marL="0">
               <a:buNone/>
             </a:pPr>
             <a:r>
@@ -3284,7 +3862,7 @@
           <a:bodyPr wrap="square" rtlCol="0" anchor="ctr"/>
           <a:lstStyle/>
           <a:p>
-            <a:pPr marL="0" indent="0">
+            <a:pPr indent="0" marL="0">
               <a:buNone/>
             </a:pPr>
             <a:r>
@@ -3321,13 +3899,6 @@
           </a:solidFill>
           <a:ln/>
         </p:spPr>
-        <p:txBody>
-          <a:bodyPr/>
-          <a:lstStyle/>
-          <a:p>
-            <a:endParaRPr lang="en-NZ"/>
-          </a:p>
-        </p:txBody>
       </p:sp>
       <p:sp>
         <p:nvSpPr>
@@ -3350,7 +3921,7 @@
           <a:bodyPr wrap="square" rtlCol="0" anchor="ctr"/>
           <a:lstStyle/>
           <a:p>
-            <a:pPr marL="0" indent="0">
+            <a:pPr indent="0" marL="0">
               <a:buNone/>
             </a:pPr>
             <a:r>
@@ -3389,7 +3960,7 @@
           <a:bodyPr wrap="square" rtlCol="0" anchor="ctr"/>
           <a:lstStyle/>
           <a:p>
-            <a:pPr marL="0" indent="0">
+            <a:pPr indent="0" marL="0">
               <a:buNone/>
             </a:pPr>
             <a:r>
@@ -3426,13 +3997,6 @@
           </a:solidFill>
           <a:ln/>
         </p:spPr>
-        <p:txBody>
-          <a:bodyPr/>
-          <a:lstStyle/>
-          <a:p>
-            <a:endParaRPr lang="en-NZ"/>
-          </a:p>
-        </p:txBody>
       </p:sp>
       <p:sp>
         <p:nvSpPr>
@@ -3455,7 +4019,7 @@
           <a:bodyPr wrap="square" rtlCol="0" anchor="ctr"/>
           <a:lstStyle/>
           <a:p>
-            <a:pPr marL="0" indent="0">
+            <a:pPr indent="0" marL="0">
               <a:buNone/>
             </a:pPr>
             <a:r>
@@ -3494,7 +4058,7 @@
           <a:bodyPr wrap="square" rtlCol="0" anchor="ctr"/>
           <a:lstStyle/>
           <a:p>
-            <a:pPr marL="0" indent="0">
+            <a:pPr indent="0" marL="0">
               <a:buNone/>
             </a:pPr>
             <a:r>
@@ -3531,13 +4095,6 @@
           </a:solidFill>
           <a:ln/>
         </p:spPr>
-        <p:txBody>
-          <a:bodyPr/>
-          <a:lstStyle/>
-          <a:p>
-            <a:endParaRPr lang="en-NZ"/>
-          </a:p>
-        </p:txBody>
       </p:sp>
       <p:sp>
         <p:nvSpPr>
@@ -3560,7 +4117,7 @@
           <a:bodyPr wrap="square" rtlCol="0" anchor="ctr"/>
           <a:lstStyle/>
           <a:p>
-            <a:pPr marL="0" indent="0">
+            <a:pPr indent="0" marL="0">
               <a:buNone/>
             </a:pPr>
             <a:r>
@@ -3572,7 +4129,7 @@
                 <a:ea typeface="Calibri" pitchFamily="34" charset="-122"/>
                 <a:cs typeface="Calibri" pitchFamily="34" charset="-120"/>
               </a:rPr>
-              <a:t>Automated Triage</a:t>
+              <a:t>Automated Triage &amp; Response</a:t>
             </a:r>
             <a:endParaRPr lang="en-US" sz="1600" dirty="0"/>
           </a:p>
@@ -3599,7 +4156,7 @@
           <a:bodyPr wrap="square" rtlCol="0" anchor="ctr"/>
           <a:lstStyle/>
           <a:p>
-            <a:pPr marL="0" indent="0">
+            <a:pPr indent="0" marL="0">
               <a:buNone/>
             </a:pPr>
             <a:r>
@@ -3611,7 +4168,7 @@
                 <a:ea typeface="Calibri" pitchFamily="34" charset="-122"/>
                 <a:cs typeface="Calibri" pitchFamily="34" charset="-120"/>
               </a:rPr>
-              <a:t>Closed the loop: detection read AND written back via API</a:t>
+              <a:t>Closed the loop: read, triaged, and contained hosts via API — with safety-first dry-run design</a:t>
             </a:r>
             <a:endParaRPr lang="en-US" sz="1250" dirty="0"/>
           </a:p>
@@ -3636,13 +4193,6 @@
           </a:solidFill>
           <a:ln/>
         </p:spPr>
-        <p:txBody>
-          <a:bodyPr/>
-          <a:lstStyle/>
-          <a:p>
-            <a:endParaRPr lang="en-NZ"/>
-          </a:p>
-        </p:txBody>
       </p:sp>
       <p:sp>
         <p:nvSpPr>
@@ -3665,7 +4215,7 @@
           <a:bodyPr wrap="square" rtlCol="0" anchor="ctr"/>
           <a:lstStyle/>
           <a:p>
-            <a:pPr marL="0" indent="0">
+            <a:pPr indent="0" marL="0">
               <a:buNone/>
             </a:pPr>
             <a:r>
@@ -3704,7 +4254,7 @@
           <a:bodyPr wrap="square" rtlCol="0" anchor="ctr"/>
           <a:lstStyle/>
           <a:p>
-            <a:pPr marL="0" indent="0">
+            <a:pPr indent="0" marL="0">
               <a:buNone/>
             </a:pPr>
             <a:r>
@@ -3741,13 +4291,6 @@
           </a:solidFill>
           <a:ln/>
         </p:spPr>
-        <p:txBody>
-          <a:bodyPr/>
-          <a:lstStyle/>
-          <a:p>
-            <a:endParaRPr lang="en-NZ"/>
-          </a:p>
-        </p:txBody>
       </p:sp>
       <p:sp>
         <p:nvSpPr>
@@ -3770,7 +4313,7 @@
           <a:bodyPr wrap="square" rtlCol="0" anchor="ctr"/>
           <a:lstStyle/>
           <a:p>
-            <a:pPr marL="0" indent="0">
+            <a:pPr indent="0" marL="0">
               <a:buNone/>
             </a:pPr>
             <a:r>
@@ -3809,7 +4352,7 @@
           <a:bodyPr wrap="square" rtlCol="0" anchor="ctr"/>
           <a:lstStyle/>
           <a:p>
-            <a:pPr marL="0" indent="0">
+            <a:pPr indent="0" marL="0">
               <a:buNone/>
             </a:pPr>
             <a:r>
@@ -3849,13 +4392,6 @@
             <a:prstDash val="solid"/>
           </a:ln>
         </p:spPr>
-        <p:txBody>
-          <a:bodyPr/>
-          <a:lstStyle/>
-          <a:p>
-            <a:endParaRPr lang="en-NZ"/>
-          </a:p>
-        </p:txBody>
       </p:sp>
       <p:sp>
         <p:nvSpPr>
@@ -3878,7 +4414,7 @@
           <a:bodyPr wrap="square" rtlCol="0" anchor="ctr"/>
           <a:lstStyle/>
           <a:p>
-            <a:pPr marL="0" indent="0">
+            <a:pPr indent="0" marL="0">
               <a:buNone/>
             </a:pPr>
             <a:r>
@@ -3917,7 +4453,7 @@
           <a:bodyPr wrap="square" rtlCol="0" anchor="ctr"/>
           <a:lstStyle/>
           <a:p>
-            <a:pPr marL="0" indent="0">
+            <a:pPr indent="0" marL="0">
               <a:buNone/>
             </a:pPr>
             <a:r>
@@ -3951,7 +4487,6 @@
         <a:solidFill>
           <a:srgbClr val="FFFFFF"/>
         </a:solidFill>
-        <a:effectLst/>
       </p:bgPr>
     </p:bg>
     <p:spTree>
@@ -3989,11 +4524,11 @@
           <a:bodyPr wrap="square" rtlCol="0" anchor="ctr"/>
           <a:lstStyle/>
           <a:p>
-            <a:pPr marL="0" indent="0">
-              <a:buNone/>
-            </a:pPr>
-            <a:r>
-              <a:rPr lang="en-US" sz="1300" b="1" kern="0" spc="200" dirty="0">
+            <a:pPr indent="0" marL="0">
+              <a:buNone/>
+            </a:pPr>
+            <a:r>
+              <a:rPr lang="en-US" sz="1300" b="1" spc="200" kern="0" dirty="0">
                 <a:solidFill>
                   <a:srgbClr val="00B4D8"/>
                 </a:solidFill>
@@ -4028,7 +4563,7 @@
           <a:bodyPr wrap="square" rtlCol="0" anchor="ctr"/>
           <a:lstStyle/>
           <a:p>
-            <a:pPr marL="0" indent="0">
+            <a:pPr indent="0" marL="0">
               <a:buNone/>
             </a:pPr>
             <a:r>
@@ -4067,20 +4602,13 @@
           </a:solidFill>
           <a:ln/>
           <a:effectLst>
-            <a:outerShdw blurRad="76200" dist="25400" dir="5400000" algn="bl" rotWithShape="0">
+            <a:outerShdw sx="100000" sy="100000" kx="0" ky="0" algn="bl" rotWithShape="0" blurRad="76200" dist="25400" dir="5400000">
               <a:srgbClr val="000000">
                 <a:alpha val="25000"/>
               </a:srgbClr>
             </a:outerShdw>
           </a:effectLst>
         </p:spPr>
-        <p:txBody>
-          <a:bodyPr/>
-          <a:lstStyle/>
-          <a:p>
-            <a:endParaRPr lang="en-NZ"/>
-          </a:p>
-        </p:txBody>
       </p:sp>
       <p:sp>
         <p:nvSpPr>
@@ -4103,7 +4631,7 @@
           <a:bodyPr wrap="square" lIns="0" tIns="0" rIns="0" bIns="0" rtlCol="0" anchor="ctr"/>
           <a:lstStyle/>
           <a:p>
-            <a:pPr marL="0" indent="0" algn="ctr">
+            <a:pPr algn="ctr" indent="0" marL="0">
               <a:buNone/>
             </a:pPr>
             <a:r>
@@ -4120,7 +4648,7 @@
             <a:endParaRPr lang="en-US" sz="1050" dirty="0"/>
           </a:p>
           <a:p>
-            <a:pPr marL="0" indent="0" algn="ctr">
+            <a:pPr algn="ctr" indent="0" marL="0">
               <a:buNone/>
             </a:pPr>
             <a:r>
@@ -4159,7 +4687,7 @@
           <a:bodyPr wrap="square" lIns="0" tIns="0" rIns="0" bIns="0" rtlCol="0" anchor="ctr"/>
           <a:lstStyle/>
           <a:p>
-            <a:pPr marL="0" indent="0" algn="ctr">
+            <a:pPr algn="ctr" indent="0" marL="0">
               <a:buNone/>
             </a:pPr>
             <a:r>
@@ -4198,20 +4726,13 @@
           </a:solidFill>
           <a:ln/>
           <a:effectLst>
-            <a:outerShdw blurRad="76200" dist="25400" dir="5400000" algn="bl" rotWithShape="0">
+            <a:outerShdw sx="100000" sy="100000" kx="0" ky="0" algn="bl" rotWithShape="0" blurRad="76200" dist="25400" dir="5400000">
               <a:srgbClr val="000000">
                 <a:alpha val="25000"/>
               </a:srgbClr>
             </a:outerShdw>
           </a:effectLst>
         </p:spPr>
-        <p:txBody>
-          <a:bodyPr/>
-          <a:lstStyle/>
-          <a:p>
-            <a:endParaRPr lang="en-NZ"/>
-          </a:p>
-        </p:txBody>
       </p:sp>
       <p:sp>
         <p:nvSpPr>
@@ -4234,7 +4755,7 @@
           <a:bodyPr wrap="square" lIns="0" tIns="0" rIns="0" bIns="0" rtlCol="0" anchor="ctr"/>
           <a:lstStyle/>
           <a:p>
-            <a:pPr marL="0" indent="0" algn="ctr">
+            <a:pPr algn="ctr" indent="0" marL="0">
               <a:buNone/>
             </a:pPr>
             <a:r>
@@ -4251,7 +4772,7 @@
             <a:endParaRPr lang="en-US" sz="1050" dirty="0"/>
           </a:p>
           <a:p>
-            <a:pPr marL="0" indent="0" algn="ctr">
+            <a:pPr algn="ctr" indent="0" marL="0">
               <a:buNone/>
             </a:pPr>
             <a:r>
@@ -4268,7 +4789,7 @@
             <a:endParaRPr lang="en-US" sz="1050" dirty="0"/>
           </a:p>
           <a:p>
-            <a:pPr marL="0" indent="0" algn="ctr">
+            <a:pPr algn="ctr" indent="0" marL="0">
               <a:buNone/>
             </a:pPr>
             <a:r>
@@ -4307,7 +4828,7 @@
           <a:bodyPr wrap="square" lIns="0" tIns="0" rIns="0" bIns="0" rtlCol="0" anchor="ctr"/>
           <a:lstStyle/>
           <a:p>
-            <a:pPr marL="0" indent="0" algn="ctr">
+            <a:pPr algn="ctr" indent="0" marL="0">
               <a:buNone/>
             </a:pPr>
             <a:r>
@@ -4346,20 +4867,13 @@
           </a:solidFill>
           <a:ln/>
           <a:effectLst>
-            <a:outerShdw blurRad="76200" dist="25400" dir="5400000" algn="bl" rotWithShape="0">
+            <a:outerShdw sx="100000" sy="100000" kx="0" ky="0" algn="bl" rotWithShape="0" blurRad="76200" dist="25400" dir="5400000">
               <a:srgbClr val="000000">
                 <a:alpha val="25000"/>
               </a:srgbClr>
             </a:outerShdw>
           </a:effectLst>
         </p:spPr>
-        <p:txBody>
-          <a:bodyPr/>
-          <a:lstStyle/>
-          <a:p>
-            <a:endParaRPr lang="en-NZ"/>
-          </a:p>
-        </p:txBody>
       </p:sp>
       <p:sp>
         <p:nvSpPr>
@@ -4382,7 +4896,7 @@
           <a:bodyPr wrap="square" lIns="0" tIns="0" rIns="0" bIns="0" rtlCol="0" anchor="ctr"/>
           <a:lstStyle/>
           <a:p>
-            <a:pPr marL="0" indent="0" algn="ctr">
+            <a:pPr algn="ctr" indent="0" marL="0">
               <a:buNone/>
             </a:pPr>
             <a:r>
@@ -4399,7 +4913,7 @@
             <a:endParaRPr lang="en-US" sz="1050" dirty="0"/>
           </a:p>
           <a:p>
-            <a:pPr marL="0" indent="0" algn="ctr">
+            <a:pPr algn="ctr" indent="0" marL="0">
               <a:buNone/>
             </a:pPr>
             <a:r>
@@ -4438,7 +4952,7 @@
           <a:bodyPr wrap="square" lIns="0" tIns="0" rIns="0" bIns="0" rtlCol="0" anchor="ctr"/>
           <a:lstStyle/>
           <a:p>
-            <a:pPr marL="0" indent="0" algn="ctr">
+            <a:pPr algn="ctr" indent="0" marL="0">
               <a:buNone/>
             </a:pPr>
             <a:r>
@@ -4477,20 +4991,13 @@
           </a:solidFill>
           <a:ln/>
           <a:effectLst>
-            <a:outerShdw blurRad="76200" dist="25400" dir="5400000" algn="bl" rotWithShape="0">
+            <a:outerShdw sx="100000" sy="100000" kx="0" ky="0" algn="bl" rotWithShape="0" blurRad="76200" dist="25400" dir="5400000">
               <a:srgbClr val="000000">
                 <a:alpha val="25000"/>
               </a:srgbClr>
             </a:outerShdw>
           </a:effectLst>
         </p:spPr>
-        <p:txBody>
-          <a:bodyPr/>
-          <a:lstStyle/>
-          <a:p>
-            <a:endParaRPr lang="en-NZ"/>
-          </a:p>
-        </p:txBody>
       </p:sp>
       <p:sp>
         <p:nvSpPr>
@@ -4513,7 +5020,7 @@
           <a:bodyPr wrap="square" lIns="0" tIns="0" rIns="0" bIns="0" rtlCol="0" anchor="ctr"/>
           <a:lstStyle/>
           <a:p>
-            <a:pPr marL="0" indent="0" algn="ctr">
+            <a:pPr algn="ctr" indent="0" marL="0">
               <a:buNone/>
             </a:pPr>
             <a:r>
@@ -4530,7 +5037,7 @@
             <a:endParaRPr lang="en-US" sz="1050" dirty="0"/>
           </a:p>
           <a:p>
-            <a:pPr marL="0" indent="0" algn="ctr">
+            <a:pPr algn="ctr" indent="0" marL="0">
               <a:buNone/>
             </a:pPr>
             <a:r>
@@ -4569,7 +5076,7 @@
           <a:bodyPr wrap="square" lIns="0" tIns="0" rIns="0" bIns="0" rtlCol="0" anchor="ctr"/>
           <a:lstStyle/>
           <a:p>
-            <a:pPr marL="0" indent="0" algn="ctr">
+            <a:pPr algn="ctr" indent="0" marL="0">
               <a:buNone/>
             </a:pPr>
             <a:r>
@@ -4608,20 +5115,13 @@
           </a:solidFill>
           <a:ln/>
           <a:effectLst>
-            <a:outerShdw blurRad="76200" dist="25400" dir="5400000" algn="bl" rotWithShape="0">
+            <a:outerShdw sx="100000" sy="100000" kx="0" ky="0" algn="bl" rotWithShape="0" blurRad="76200" dist="25400" dir="5400000">
               <a:srgbClr val="000000">
                 <a:alpha val="25000"/>
               </a:srgbClr>
             </a:outerShdw>
           </a:effectLst>
         </p:spPr>
-        <p:txBody>
-          <a:bodyPr/>
-          <a:lstStyle/>
-          <a:p>
-            <a:endParaRPr lang="en-NZ"/>
-          </a:p>
-        </p:txBody>
       </p:sp>
       <p:sp>
         <p:nvSpPr>
@@ -4644,7 +5144,7 @@
           <a:bodyPr wrap="square" lIns="0" tIns="0" rIns="0" bIns="0" rtlCol="0" anchor="ctr"/>
           <a:lstStyle/>
           <a:p>
-            <a:pPr marL="0" indent="0" algn="ctr">
+            <a:pPr algn="ctr" indent="0" marL="0">
               <a:buNone/>
             </a:pPr>
             <a:r>
@@ -4661,7 +5161,7 @@
             <a:endParaRPr lang="en-US" sz="1050" dirty="0"/>
           </a:p>
           <a:p>
-            <a:pPr marL="0" indent="0" algn="ctr">
+            <a:pPr algn="ctr" indent="0" marL="0">
               <a:buNone/>
             </a:pPr>
             <a:r>
@@ -4700,7 +5200,7 @@
           <a:bodyPr wrap="square" lIns="0" tIns="0" rIns="0" bIns="0" rtlCol="0" anchor="ctr"/>
           <a:lstStyle/>
           <a:p>
-            <a:pPr marL="0" indent="0" algn="ctr">
+            <a:pPr algn="ctr" indent="0" marL="0">
               <a:buNone/>
             </a:pPr>
             <a:r>
@@ -4739,20 +5239,13 @@
           </a:solidFill>
           <a:ln/>
           <a:effectLst>
-            <a:outerShdw blurRad="76200" dist="25400" dir="5400000" algn="bl" rotWithShape="0">
+            <a:outerShdw sx="100000" sy="100000" kx="0" ky="0" algn="bl" rotWithShape="0" blurRad="76200" dist="25400" dir="5400000">
               <a:srgbClr val="000000">
                 <a:alpha val="25000"/>
               </a:srgbClr>
             </a:outerShdw>
           </a:effectLst>
         </p:spPr>
-        <p:txBody>
-          <a:bodyPr/>
-          <a:lstStyle/>
-          <a:p>
-            <a:endParaRPr lang="en-NZ"/>
-          </a:p>
-        </p:txBody>
       </p:sp>
       <p:sp>
         <p:nvSpPr>
@@ -4775,7 +5268,7 @@
           <a:bodyPr wrap="square" lIns="0" tIns="0" rIns="0" bIns="0" rtlCol="0" anchor="ctr"/>
           <a:lstStyle/>
           <a:p>
-            <a:pPr marL="0" indent="0" algn="ctr">
+            <a:pPr algn="ctr" indent="0" marL="0">
               <a:buNone/>
             </a:pPr>
             <a:r>
@@ -4792,7 +5285,7 @@
             <a:endParaRPr lang="en-US" sz="1050" dirty="0"/>
           </a:p>
           <a:p>
-            <a:pPr marL="0" indent="0" algn="ctr">
+            <a:pPr algn="ctr" indent="0" marL="0">
               <a:buNone/>
             </a:pPr>
             <a:r>
@@ -4809,7 +5302,7 @@
             <a:endParaRPr lang="en-US" sz="1050" dirty="0"/>
           </a:p>
           <a:p>
-            <a:pPr marL="0" indent="0" algn="ctr">
+            <a:pPr algn="ctr" indent="0" marL="0">
               <a:buNone/>
             </a:pPr>
             <a:r>
@@ -4848,7 +5341,7 @@
           <a:bodyPr wrap="square" rtlCol="0" anchor="ctr"/>
           <a:lstStyle/>
           <a:p>
-            <a:pPr marL="0" indent="0" algn="ctr">
+            <a:pPr algn="ctr" indent="0" marL="0">
               <a:buNone/>
             </a:pPr>
             <a:r>
@@ -4882,7 +5375,6 @@
         <a:solidFill>
           <a:srgbClr val="FFFFFF"/>
         </a:solidFill>
-        <a:effectLst/>
       </p:bgPr>
     </p:bg>
     <p:spTree>
@@ -4918,13 +5410,6 @@
           </a:solidFill>
           <a:ln/>
         </p:spPr>
-        <p:txBody>
-          <a:bodyPr/>
-          <a:lstStyle/>
-          <a:p>
-            <a:endParaRPr lang="en-NZ"/>
-          </a:p>
-        </p:txBody>
       </p:sp>
       <p:sp>
         <p:nvSpPr>
@@ -4947,7 +5432,7 @@
           <a:bodyPr wrap="square" lIns="0" tIns="0" rIns="0" bIns="0" rtlCol="0" anchor="ctr"/>
           <a:lstStyle/>
           <a:p>
-            <a:pPr marL="0" indent="0" algn="ctr">
+            <a:pPr algn="ctr" indent="0" marL="0">
               <a:buNone/>
             </a:pPr>
             <a:r>
@@ -4986,11 +5471,11 @@
           <a:bodyPr wrap="square" rtlCol="0" anchor="ctr"/>
           <a:lstStyle/>
           <a:p>
-            <a:pPr marL="0" indent="0">
-              <a:buNone/>
-            </a:pPr>
-            <a:r>
-              <a:rPr lang="en-US" sz="1200" b="1" kern="0" spc="200" dirty="0">
+            <a:pPr indent="0" marL="0">
+              <a:buNone/>
+            </a:pPr>
+            <a:r>
+              <a:rPr lang="en-US" sz="1200" b="1" spc="200" kern="0" dirty="0">
                 <a:solidFill>
                   <a:srgbClr val="00B4D8"/>
                 </a:solidFill>
@@ -5025,7 +5510,7 @@
           <a:bodyPr wrap="square" rtlCol="0" anchor="ctr"/>
           <a:lstStyle/>
           <a:p>
-            <a:pPr marL="0" indent="0">
+            <a:pPr indent="0" marL="0">
               <a:buNone/>
             </a:pPr>
             <a:r>
@@ -5154,31 +5639,24 @@
             <a:prstDash val="solid"/>
           </a:ln>
           <a:effectLst>
-            <a:outerShdw blurRad="101600" dist="38100" dir="5400000" algn="bl" rotWithShape="0">
+            <a:outerShdw sx="100000" sy="100000" kx="0" ky="0" algn="bl" rotWithShape="0" blurRad="101600" dist="38100" dir="5400000">
               <a:srgbClr val="000000">
                 <a:alpha val="18000"/>
               </a:srgbClr>
             </a:outerShdw>
           </a:effectLst>
         </p:spPr>
-        <p:txBody>
-          <a:bodyPr/>
-          <a:lstStyle/>
-          <a:p>
-            <a:endParaRPr lang="en-NZ"/>
-          </a:p>
-        </p:txBody>
       </p:sp>
       <p:pic>
         <p:nvPicPr>
-          <p:cNvPr id="8" name="Image 0" descr="/home/claude/crowdstrike_pptx/img/01_api_client_scopes.png"/>
+          <p:cNvPr id="8" name="Image 0" descr="/home/claude/crowdstrike_pptx/img/01_api_client_scopes.png">    </p:cNvPr>
           <p:cNvPicPr>
             <a:picLocks noChangeAspect="1"/>
           </p:cNvPicPr>
           <p:nvPr/>
         </p:nvPicPr>
         <p:blipFill>
-          <a:blip r:embed="rId3"/>
+          <a:blip r:embed="rId1"/>
           <a:stretch>
             <a:fillRect/>
           </a:stretch>
@@ -5209,7 +5687,6 @@
         <a:solidFill>
           <a:srgbClr val="FFFFFF"/>
         </a:solidFill>
-        <a:effectLst/>
       </p:bgPr>
     </p:bg>
     <p:spTree>
@@ -5245,13 +5722,6 @@
           </a:solidFill>
           <a:ln/>
         </p:spPr>
-        <p:txBody>
-          <a:bodyPr/>
-          <a:lstStyle/>
-          <a:p>
-            <a:endParaRPr lang="en-NZ"/>
-          </a:p>
-        </p:txBody>
       </p:sp>
       <p:sp>
         <p:nvSpPr>
@@ -5274,7 +5744,7 @@
           <a:bodyPr wrap="square" lIns="0" tIns="0" rIns="0" bIns="0" rtlCol="0" anchor="ctr"/>
           <a:lstStyle/>
           <a:p>
-            <a:pPr marL="0" indent="0" algn="ctr">
+            <a:pPr algn="ctr" indent="0" marL="0">
               <a:buNone/>
             </a:pPr>
             <a:r>
@@ -5313,11 +5783,11 @@
           <a:bodyPr wrap="square" rtlCol="0" anchor="ctr"/>
           <a:lstStyle/>
           <a:p>
-            <a:pPr marL="0" indent="0">
-              <a:buNone/>
-            </a:pPr>
-            <a:r>
-              <a:rPr lang="en-US" sz="1200" b="1" kern="0" spc="200" dirty="0">
+            <a:pPr indent="0" marL="0">
+              <a:buNone/>
+            </a:pPr>
+            <a:r>
+              <a:rPr lang="en-US" sz="1200" b="1" spc="200" kern="0" dirty="0">
                 <a:solidFill>
                   <a:srgbClr val="00B4D8"/>
                 </a:solidFill>
@@ -5352,7 +5822,7 @@
           <a:bodyPr wrap="square" rtlCol="0" anchor="ctr"/>
           <a:lstStyle/>
           <a:p>
-            <a:pPr marL="0" indent="0">
+            <a:pPr indent="0" marL="0">
               <a:buNone/>
             </a:pPr>
             <a:r>
@@ -5481,31 +5951,24 @@
             <a:prstDash val="solid"/>
           </a:ln>
           <a:effectLst>
-            <a:outerShdw blurRad="101600" dist="38100" dir="5400000" algn="bl" rotWithShape="0">
+            <a:outerShdw sx="100000" sy="100000" kx="0" ky="0" algn="bl" rotWithShape="0" blurRad="101600" dist="38100" dir="5400000">
               <a:srgbClr val="000000">
                 <a:alpha val="18000"/>
               </a:srgbClr>
             </a:outerShdw>
           </a:effectLst>
         </p:spPr>
-        <p:txBody>
-          <a:bodyPr/>
-          <a:lstStyle/>
-          <a:p>
-            <a:endParaRPr lang="en-NZ"/>
-          </a:p>
-        </p:txBody>
       </p:sp>
       <p:pic>
         <p:nvPicPr>
-          <p:cNvPr id="8" name="Image 0" descr="/home/claude/crowdstrike_pptx/img/02_host_reporting.png"/>
+          <p:cNvPr id="8" name="Image 0" descr="/home/claude/crowdstrike_pptx/img/02_host_reporting.png">    </p:cNvPr>
           <p:cNvPicPr>
             <a:picLocks noChangeAspect="1"/>
           </p:cNvPicPr>
           <p:nvPr/>
         </p:nvPicPr>
         <p:blipFill>
-          <a:blip r:embed="rId3"/>
+          <a:blip r:embed="rId1"/>
           <a:stretch>
             <a:fillRect/>
           </a:stretch>
@@ -5536,7 +5999,6 @@
         <a:solidFill>
           <a:srgbClr val="FFFFFF"/>
         </a:solidFill>
-        <a:effectLst/>
       </p:bgPr>
     </p:bg>
     <p:spTree>
@@ -5572,13 +6034,6 @@
           </a:solidFill>
           <a:ln/>
         </p:spPr>
-        <p:txBody>
-          <a:bodyPr/>
-          <a:lstStyle/>
-          <a:p>
-            <a:endParaRPr lang="en-NZ"/>
-          </a:p>
-        </p:txBody>
       </p:sp>
       <p:sp>
         <p:nvSpPr>
@@ -5601,7 +6056,7 @@
           <a:bodyPr wrap="square" lIns="0" tIns="0" rIns="0" bIns="0" rtlCol="0" anchor="ctr"/>
           <a:lstStyle/>
           <a:p>
-            <a:pPr marL="0" indent="0" algn="ctr">
+            <a:pPr algn="ctr" indent="0" marL="0">
               <a:buNone/>
             </a:pPr>
             <a:r>
@@ -5640,11 +6095,11 @@
           <a:bodyPr wrap="square" rtlCol="0" anchor="ctr"/>
           <a:lstStyle/>
           <a:p>
-            <a:pPr marL="0" indent="0">
-              <a:buNone/>
-            </a:pPr>
-            <a:r>
-              <a:rPr lang="en-US" sz="1200" b="1" kern="0" spc="200" dirty="0">
+            <a:pPr indent="0" marL="0">
+              <a:buNone/>
+            </a:pPr>
+            <a:r>
+              <a:rPr lang="en-US" sz="1200" b="1" spc="200" kern="0" dirty="0">
                 <a:solidFill>
                   <a:srgbClr val="00B4D8"/>
                 </a:solidFill>
@@ -5679,7 +6134,7 @@
           <a:bodyPr wrap="square" rtlCol="0" anchor="ctr"/>
           <a:lstStyle/>
           <a:p>
-            <a:pPr marL="0" indent="0">
+            <a:pPr indent="0" marL="0">
               <a:buNone/>
             </a:pPr>
             <a:r>
@@ -5787,31 +6242,24 @@
             <a:prstDash val="solid"/>
           </a:ln>
           <a:effectLst>
-            <a:outerShdw blurRad="101600" dist="38100" dir="5400000" algn="bl" rotWithShape="0">
+            <a:outerShdw sx="100000" sy="100000" kx="0" ky="0" algn="bl" rotWithShape="0" blurRad="101600" dist="38100" dir="5400000">
               <a:srgbClr val="000000">
                 <a:alpha val="18000"/>
               </a:srgbClr>
             </a:outerShdw>
           </a:effectLst>
         </p:spPr>
-        <p:txBody>
-          <a:bodyPr/>
-          <a:lstStyle/>
-          <a:p>
-            <a:endParaRPr lang="en-NZ"/>
-          </a:p>
-        </p:txBody>
       </p:sp>
       <p:pic>
         <p:nvPicPr>
-          <p:cNvPr id="8" name="Image 0" descr="/home/claude/crowdstrike_pptx/img/03_error_404.png"/>
+          <p:cNvPr id="8" name="Image 0" descr="/home/claude/crowdstrike_pptx/img/03_error_404.png">    </p:cNvPr>
           <p:cNvPicPr>
             <a:picLocks noChangeAspect="1"/>
           </p:cNvPicPr>
           <p:nvPr/>
         </p:nvPicPr>
         <p:blipFill>
-          <a:blip r:embed="rId3"/>
+          <a:blip r:embed="rId1"/>
           <a:stretch>
             <a:fillRect/>
           </a:stretch>
@@ -5842,7 +6290,6 @@
         <a:solidFill>
           <a:srgbClr val="FFFFFF"/>
         </a:solidFill>
-        <a:effectLst/>
       </p:bgPr>
     </p:bg>
     <p:spTree>
@@ -5878,13 +6325,6 @@
           </a:solidFill>
           <a:ln/>
         </p:spPr>
-        <p:txBody>
-          <a:bodyPr/>
-          <a:lstStyle/>
-          <a:p>
-            <a:endParaRPr lang="en-NZ"/>
-          </a:p>
-        </p:txBody>
       </p:sp>
       <p:sp>
         <p:nvSpPr>
@@ -5907,7 +6347,7 @@
           <a:bodyPr wrap="square" lIns="0" tIns="0" rIns="0" bIns="0" rtlCol="0" anchor="ctr"/>
           <a:lstStyle/>
           <a:p>
-            <a:pPr marL="0" indent="0" algn="ctr">
+            <a:pPr algn="ctr" indent="0" marL="0">
               <a:buNone/>
             </a:pPr>
             <a:r>
@@ -5946,11 +6386,11 @@
           <a:bodyPr wrap="square" rtlCol="0" anchor="ctr"/>
           <a:lstStyle/>
           <a:p>
-            <a:pPr marL="0" indent="0">
-              <a:buNone/>
-            </a:pPr>
-            <a:r>
-              <a:rPr lang="en-US" sz="1200" b="1" kern="0" spc="200" dirty="0">
+            <a:pPr indent="0" marL="0">
+              <a:buNone/>
+            </a:pPr>
+            <a:r>
+              <a:rPr lang="en-US" sz="1200" b="1" spc="200" kern="0" dirty="0">
                 <a:solidFill>
                   <a:srgbClr val="00B4D8"/>
                 </a:solidFill>
@@ -5985,7 +6425,7 @@
           <a:bodyPr wrap="square" rtlCol="0" anchor="ctr"/>
           <a:lstStyle/>
           <a:p>
-            <a:pPr marL="0" indent="0">
+            <a:pPr indent="0" marL="0">
               <a:buNone/>
             </a:pPr>
             <a:r>
@@ -6093,31 +6533,24 @@
             <a:prstDash val="solid"/>
           </a:ln>
           <a:effectLst>
-            <a:outerShdw blurRad="101600" dist="38100" dir="5400000" algn="bl" rotWithShape="0">
+            <a:outerShdw sx="100000" sy="100000" kx="0" ky="0" algn="bl" rotWithShape="0" blurRad="101600" dist="38100" dir="5400000">
               <a:srgbClr val="000000">
                 <a:alpha val="18000"/>
               </a:srgbClr>
             </a:outerShdw>
           </a:effectLst>
         </p:spPr>
-        <p:txBody>
-          <a:bodyPr/>
-          <a:lstStyle/>
-          <a:p>
-            <a:endParaRPr lang="en-NZ"/>
-          </a:p>
-        </p:txBody>
       </p:sp>
       <p:pic>
         <p:nvPicPr>
-          <p:cNvPr id="8" name="Image 0" descr="/home/claude/crowdstrike_pptx/img/04_error_403.png"/>
+          <p:cNvPr id="8" name="Image 0" descr="/home/claude/crowdstrike_pptx/img/04_error_403.png">    </p:cNvPr>
           <p:cNvPicPr>
             <a:picLocks noChangeAspect="1"/>
           </p:cNvPicPr>
           <p:nvPr/>
         </p:nvPicPr>
         <p:blipFill>
-          <a:blip r:embed="rId3"/>
+          <a:blip r:embed="rId1"/>
           <a:stretch>
             <a:fillRect/>
           </a:stretch>
@@ -6148,7 +6581,6 @@
         <a:solidFill>
           <a:srgbClr val="FFFFFF"/>
         </a:solidFill>
-        <a:effectLst/>
       </p:bgPr>
     </p:bg>
     <p:spTree>
@@ -6184,13 +6616,6 @@
           </a:solidFill>
           <a:ln/>
         </p:spPr>
-        <p:txBody>
-          <a:bodyPr/>
-          <a:lstStyle/>
-          <a:p>
-            <a:endParaRPr lang="en-NZ"/>
-          </a:p>
-        </p:txBody>
       </p:sp>
       <p:sp>
         <p:nvSpPr>
@@ -6213,7 +6638,7 @@
           <a:bodyPr wrap="square" lIns="0" tIns="0" rIns="0" bIns="0" rtlCol="0" anchor="ctr"/>
           <a:lstStyle/>
           <a:p>
-            <a:pPr marL="0" indent="0" algn="ctr">
+            <a:pPr algn="ctr" indent="0" marL="0">
               <a:buNone/>
             </a:pPr>
             <a:r>
@@ -6252,11 +6677,11 @@
           <a:bodyPr wrap="square" rtlCol="0" anchor="ctr"/>
           <a:lstStyle/>
           <a:p>
-            <a:pPr marL="0" indent="0">
-              <a:buNone/>
-            </a:pPr>
-            <a:r>
-              <a:rPr lang="en-US" sz="1200" b="1" kern="0" spc="200" dirty="0">
+            <a:pPr indent="0" marL="0">
+              <a:buNone/>
+            </a:pPr>
+            <a:r>
+              <a:rPr lang="en-US" sz="1200" b="1" spc="200" kern="0" dirty="0">
                 <a:solidFill>
                   <a:srgbClr val="00B4D8"/>
                 </a:solidFill>
@@ -6291,7 +6716,7 @@
           <a:bodyPr wrap="square" rtlCol="0" anchor="ctr"/>
           <a:lstStyle/>
           <a:p>
-            <a:pPr marL="0" indent="0">
+            <a:pPr indent="0" marL="0">
               <a:buNone/>
             </a:pPr>
             <a:r>
@@ -6399,31 +6824,24 @@
             <a:prstDash val="solid"/>
           </a:ln>
           <a:effectLst>
-            <a:outerShdw blurRad="101600" dist="38100" dir="5400000" algn="bl" rotWithShape="0">
+            <a:outerShdw sx="100000" sy="100000" kx="0" ky="0" algn="bl" rotWithShape="0" blurRad="101600" dist="38100" dir="5400000">
               <a:srgbClr val="000000">
                 <a:alpha val="18000"/>
               </a:srgbClr>
             </a:outerShdw>
           </a:effectLst>
         </p:spPr>
-        <p:txBody>
-          <a:bodyPr/>
-          <a:lstStyle/>
-          <a:p>
-            <a:endParaRPr lang="en-NZ"/>
-          </a:p>
-        </p:txBody>
       </p:sp>
       <p:pic>
         <p:nvPicPr>
-          <p:cNvPr id="8" name="Image 0" descr="/home/claude/crowdstrike_pptx/img/05_no_alerts_yet.png"/>
+          <p:cNvPr id="8" name="Image 0" descr="/home/claude/crowdstrike_pptx/img/05_no_alerts_yet.png">    </p:cNvPr>
           <p:cNvPicPr>
             <a:picLocks noChangeAspect="1"/>
           </p:cNvPicPr>
           <p:nvPr/>
         </p:nvPicPr>
         <p:blipFill>
-          <a:blip r:embed="rId3"/>
+          <a:blip r:embed="rId1"/>
           <a:stretch>
             <a:fillRect/>
           </a:stretch>
@@ -6454,7 +6872,6 @@
         <a:solidFill>
           <a:srgbClr val="23303D"/>
         </a:solidFill>
-        <a:effectLst/>
       </p:bgPr>
     </p:bg>
     <p:spTree>
@@ -6490,13 +6907,6 @@
           </a:solidFill>
           <a:ln/>
         </p:spPr>
-        <p:txBody>
-          <a:bodyPr/>
-          <a:lstStyle/>
-          <a:p>
-            <a:endParaRPr lang="en-NZ"/>
-          </a:p>
-        </p:txBody>
       </p:sp>
       <p:sp>
         <p:nvSpPr>
@@ -6519,11 +6929,11 @@
           <a:bodyPr wrap="square" rtlCol="0" anchor="ctr"/>
           <a:lstStyle/>
           <a:p>
-            <a:pPr marL="0" indent="0">
-              <a:buNone/>
-            </a:pPr>
-            <a:r>
-              <a:rPr lang="en-US" sz="1300" b="1" kern="0" spc="200" dirty="0">
+            <a:pPr indent="0" marL="0">
+              <a:buNone/>
+            </a:pPr>
+            <a:r>
+              <a:rPr lang="en-US" sz="1300" b="1" spc="200" kern="0" dirty="0">
                 <a:solidFill>
                   <a:srgbClr val="00B4D8"/>
                 </a:solidFill>
@@ -6558,7 +6968,7 @@
           <a:bodyPr wrap="square" rtlCol="0" anchor="ctr"/>
           <a:lstStyle/>
           <a:p>
-            <a:pPr marL="0" indent="0">
+            <a:pPr indent="0" marL="0">
               <a:buNone/>
             </a:pPr>
             <a:r>
@@ -6597,7 +7007,7 @@
           <a:bodyPr wrap="square" rtlCol="0" anchor="t"/>
           <a:lstStyle/>
           <a:p>
-            <a:pPr marL="0" indent="0">
+            <a:pPr indent="0" marL="0">
               <a:lnSpc>
                 <a:spcPct val="125000"/>
               </a:lnSpc>
@@ -6617,7 +7027,7 @@
             <a:endParaRPr lang="en-US" sz="1600" dirty="0"/>
           </a:p>
           <a:p>
-            <a:pPr marL="0" indent="0">
+            <a:pPr indent="0" marL="0">
               <a:lnSpc>
                 <a:spcPct val="125000"/>
               </a:lnSpc>
@@ -6638,7 +7048,7 @@
             <a:endParaRPr lang="en-US" sz="1600" dirty="0"/>
           </a:p>
           <a:p>
-            <a:pPr marL="0" indent="0">
+            <a:pPr indent="0" marL="0">
               <a:lnSpc>
                 <a:spcPct val="125000"/>
               </a:lnSpc>
@@ -6647,7 +7057,7 @@
             <a:endParaRPr lang="en-US" sz="1600" dirty="0"/>
           </a:p>
           <a:p>
-            <a:pPr marL="0" indent="0">
+            <a:pPr indent="0" marL="0">
               <a:lnSpc>
                 <a:spcPct val="125000"/>
               </a:lnSpc>
@@ -6667,7 +7077,7 @@
             <a:endParaRPr lang="en-US" sz="1600" dirty="0"/>
           </a:p>
           <a:p>
-            <a:pPr marL="0" indent="0">
+            <a:pPr indent="0" marL="0">
               <a:lnSpc>
                 <a:spcPct val="125000"/>
               </a:lnSpc>
@@ -6704,7 +7114,6 @@
         <a:solidFill>
           <a:srgbClr val="FFFFFF"/>
         </a:solidFill>
-        <a:effectLst/>
       </p:bgPr>
     </p:bg>
     <p:spTree>
@@ -6740,13 +7149,6 @@
           </a:solidFill>
           <a:ln/>
         </p:spPr>
-        <p:txBody>
-          <a:bodyPr/>
-          <a:lstStyle/>
-          <a:p>
-            <a:endParaRPr lang="en-NZ"/>
-          </a:p>
-        </p:txBody>
       </p:sp>
       <p:sp>
         <p:nvSpPr>
@@ -6769,7 +7171,7 @@
           <a:bodyPr wrap="square" lIns="0" tIns="0" rIns="0" bIns="0" rtlCol="0" anchor="ctr"/>
           <a:lstStyle/>
           <a:p>
-            <a:pPr marL="0" indent="0" algn="ctr">
+            <a:pPr algn="ctr" indent="0" marL="0">
               <a:buNone/>
             </a:pPr>
             <a:r>
@@ -6808,11 +7210,11 @@
           <a:bodyPr wrap="square" rtlCol="0" anchor="ctr"/>
           <a:lstStyle/>
           <a:p>
-            <a:pPr marL="0" indent="0">
-              <a:buNone/>
-            </a:pPr>
-            <a:r>
-              <a:rPr lang="en-US" sz="1200" b="1" kern="0" spc="200" dirty="0">
+            <a:pPr indent="0" marL="0">
+              <a:buNone/>
+            </a:pPr>
+            <a:r>
+              <a:rPr lang="en-US" sz="1200" b="1" spc="200" kern="0" dirty="0">
                 <a:solidFill>
                   <a:srgbClr val="00B4D8"/>
                 </a:solidFill>
@@ -6847,7 +7249,7 @@
           <a:bodyPr wrap="square" rtlCol="0" anchor="ctr"/>
           <a:lstStyle/>
           <a:p>
-            <a:pPr marL="0" indent="0">
+            <a:pPr indent="0" marL="0">
               <a:buNone/>
             </a:pPr>
             <a:r>
@@ -6934,31 +7336,24 @@
             <a:prstDash val="solid"/>
           </a:ln>
           <a:effectLst>
-            <a:outerShdw blurRad="101600" dist="38100" dir="5400000" algn="bl" rotWithShape="0">
+            <a:outerShdw sx="100000" sy="100000" kx="0" ky="0" algn="bl" rotWithShape="0" blurRad="101600" dist="38100" dir="5400000">
               <a:srgbClr val="000000">
                 <a:alpha val="18000"/>
               </a:srgbClr>
             </a:outerShdw>
           </a:effectLst>
         </p:spPr>
-        <p:txBody>
-          <a:bodyPr/>
-          <a:lstStyle/>
-          <a:p>
-            <a:endParaRPr lang="en-NZ"/>
-          </a:p>
-        </p:txBody>
       </p:sp>
       <p:pic>
         <p:nvPicPr>
-          <p:cNvPr id="8" name="Image 0" descr="/home/claude/crowdstrike_pptx/img/06_found_10_alerts.png"/>
+          <p:cNvPr id="8" name="Image 0" descr="/home/claude/crowdstrike_pptx/img/06_found_10_alerts.png">    </p:cNvPr>
           <p:cNvPicPr>
             <a:picLocks noChangeAspect="1"/>
           </p:cNvPicPr>
           <p:nvPr/>
         </p:nvPicPr>
         <p:blipFill>
-          <a:blip r:embed="rId3"/>
+          <a:blip r:embed="rId1"/>
           <a:stretch>
             <a:fillRect/>
           </a:stretch>
@@ -7274,319 +7669,4 @@
     </a:ext>
   </a:extLst>
 </a:theme>
-</file>
-
-<file path=ppt/theme/theme2.xml><?xml version="1.0" encoding="utf-8"?>
-<a:theme xmlns:a="http://schemas.openxmlformats.org/drawingml/2006/main" name="Office Theme">
-  <a:themeElements>
-    <a:clrScheme name="Office">
-      <a:dk1>
-        <a:sysClr val="windowText" lastClr="000000"/>
-      </a:dk1>
-      <a:lt1>
-        <a:sysClr val="window" lastClr="FFFFFF"/>
-      </a:lt1>
-      <a:dk2>
-        <a:srgbClr val="0E2841"/>
-      </a:dk2>
-      <a:lt2>
-        <a:srgbClr val="E8E8E8"/>
-      </a:lt2>
-      <a:accent1>
-        <a:srgbClr val="156082"/>
-      </a:accent1>
-      <a:accent2>
-        <a:srgbClr val="E97132"/>
-      </a:accent2>
-      <a:accent3>
-        <a:srgbClr val="196B24"/>
-      </a:accent3>
-      <a:accent4>
-        <a:srgbClr val="0F9ED5"/>
-      </a:accent4>
-      <a:accent5>
-        <a:srgbClr val="A02B93"/>
-      </a:accent5>
-      <a:accent6>
-        <a:srgbClr val="4EA72E"/>
-      </a:accent6>
-      <a:hlink>
-        <a:srgbClr val="467886"/>
-      </a:hlink>
-      <a:folHlink>
-        <a:srgbClr val="96607D"/>
-      </a:folHlink>
-    </a:clrScheme>
-    <a:fontScheme name="Office">
-      <a:majorFont>
-        <a:latin typeface="Aptos Display" panose="02110004020202020204"/>
-        <a:ea typeface=""/>
-        <a:cs typeface=""/>
-        <a:font script="Jpan" typeface="游ゴシック Light"/>
-        <a:font script="Hang" typeface="맑은 고딕"/>
-        <a:font script="Hans" typeface="等线 Light"/>
-        <a:font script="Hant" typeface="新細明體"/>
-        <a:font script="Arab" typeface="Times New Roman"/>
-        <a:font script="Hebr" typeface="Times New Roman"/>
-        <a:font script="Thai" typeface="Angsana New"/>
-        <a:font script="Ethi" typeface="Nyala"/>
-        <a:font script="Beng" typeface="Vrinda"/>
-        <a:font script="Gujr" typeface="Shruti"/>
-        <a:font script="Khmr" typeface="MoolBoran"/>
-        <a:font script="Knda" typeface="Tunga"/>
-        <a:font script="Guru" typeface="Raavi"/>
-        <a:font script="Cans" typeface="Euphemia"/>
-        <a:font script="Cher" typeface="Plantagenet Cherokee"/>
-        <a:font script="Yiii" typeface="Microsoft Yi Baiti"/>
-        <a:font script="Tibt" typeface="Microsoft Himalaya"/>
-        <a:font script="Thaa" typeface="MV Boli"/>
-        <a:font script="Deva" typeface="Mangal"/>
-        <a:font script="Telu" typeface="Gautami"/>
-        <a:font script="Taml" typeface="Latha"/>
-        <a:font script="Syrc" typeface="Estrangelo Edessa"/>
-        <a:font script="Orya" typeface="Kalinga"/>
-        <a:font script="Mlym" typeface="Kartika"/>
-        <a:font script="Laoo" typeface="DokChampa"/>
-        <a:font script="Sinh" typeface="Iskoola Pota"/>
-        <a:font script="Mong" typeface="Mongolian Baiti"/>
-        <a:font script="Viet" typeface="Times New Roman"/>
-        <a:font script="Uigh" typeface="Microsoft Uighur"/>
-        <a:font script="Geor" typeface="Sylfaen"/>
-        <a:font script="Armn" typeface="Arial"/>
-        <a:font script="Bugi" typeface="Leelawadee UI"/>
-        <a:font script="Bopo" typeface="Microsoft JhengHei"/>
-        <a:font script="Java" typeface="Javanese Text"/>
-        <a:font script="Lisu" typeface="Segoe UI"/>
-        <a:font script="Mymr" typeface="Myanmar Text"/>
-        <a:font script="Nkoo" typeface="Ebrima"/>
-        <a:font script="Olck" typeface="Nirmala UI"/>
-        <a:font script="Osma" typeface="Ebrima"/>
-        <a:font script="Phag" typeface="Phagspa"/>
-        <a:font script="Syrn" typeface="Estrangelo Edessa"/>
-        <a:font script="Syrj" typeface="Estrangelo Edessa"/>
-        <a:font script="Syre" typeface="Estrangelo Edessa"/>
-        <a:font script="Sora" typeface="Nirmala UI"/>
-        <a:font script="Tale" typeface="Microsoft Tai Le"/>
-        <a:font script="Talu" typeface="Microsoft New Tai Lue"/>
-        <a:font script="Tfng" typeface="Ebrima"/>
-      </a:majorFont>
-      <a:minorFont>
-        <a:latin typeface="Aptos" panose="02110004020202020204"/>
-        <a:ea typeface=""/>
-        <a:cs typeface=""/>
-        <a:font script="Jpan" typeface="游ゴシック"/>
-        <a:font script="Hang" typeface="맑은 고딕"/>
-        <a:font script="Hans" typeface="等线"/>
-        <a:font script="Hant" typeface="新細明體"/>
-        <a:font script="Arab" typeface="Arial"/>
-        <a:font script="Hebr" typeface="Arial"/>
-        <a:font script="Thai" typeface="Cordia New"/>
-        <a:font script="Ethi" typeface="Nyala"/>
-        <a:font script="Beng" typeface="Vrinda"/>
-        <a:font script="Gujr" typeface="Shruti"/>
-        <a:font script="Khmr" typeface="DaunPenh"/>
-        <a:font script="Knda" typeface="Tunga"/>
-        <a:font script="Guru" typeface="Raavi"/>
-        <a:font script="Cans" typeface="Euphemia"/>
-        <a:font script="Cher" typeface="Plantagenet Cherokee"/>
-        <a:font script="Yiii" typeface="Microsoft Yi Baiti"/>
-        <a:font script="Tibt" typeface="Microsoft Himalaya"/>
-        <a:font script="Thaa" typeface="MV Boli"/>
-        <a:font script="Deva" typeface="Mangal"/>
-        <a:font script="Telu" typeface="Gautami"/>
-        <a:font script="Taml" typeface="Latha"/>
-        <a:font script="Syrc" typeface="Estrangelo Edessa"/>
-        <a:font script="Orya" typeface="Kalinga"/>
-        <a:font script="Mlym" typeface="Kartika"/>
-        <a:font script="Laoo" typeface="DokChampa"/>
-        <a:font script="Sinh" typeface="Iskoola Pota"/>
-        <a:font script="Mong" typeface="Mongolian Baiti"/>
-        <a:font script="Viet" typeface="Arial"/>
-        <a:font script="Uigh" typeface="Microsoft Uighur"/>
-        <a:font script="Geor" typeface="Sylfaen"/>
-        <a:font script="Armn" typeface="Arial"/>
-        <a:font script="Bugi" typeface="Leelawadee UI"/>
-        <a:font script="Bopo" typeface="Microsoft JhengHei"/>
-        <a:font script="Java" typeface="Javanese Text"/>
-        <a:font script="Lisu" typeface="Segoe UI"/>
-        <a:font script="Mymr" typeface="Myanmar Text"/>
-        <a:font script="Nkoo" typeface="Ebrima"/>
-        <a:font script="Olck" typeface="Nirmala UI"/>
-        <a:font script="Osma" typeface="Ebrima"/>
-        <a:font script="Phag" typeface="Phagspa"/>
-        <a:font script="Syrn" typeface="Estrangelo Edessa"/>
-        <a:font script="Syrj" typeface="Estrangelo Edessa"/>
-        <a:font script="Syre" typeface="Estrangelo Edessa"/>
-        <a:font script="Sora" typeface="Nirmala UI"/>
-        <a:font script="Tale" typeface="Microsoft Tai Le"/>
-        <a:font script="Talu" typeface="Microsoft New Tai Lue"/>
-        <a:font script="Tfng" typeface="Ebrima"/>
-      </a:minorFont>
-    </a:fontScheme>
-    <a:fmtScheme name="Office">
-      <a:fillStyleLst>
-        <a:solidFill>
-          <a:schemeClr val="phClr"/>
-        </a:solidFill>
-        <a:gradFill rotWithShape="1">
-          <a:gsLst>
-            <a:gs pos="0">
-              <a:schemeClr val="phClr">
-                <a:lumMod val="110000"/>
-                <a:satMod val="105000"/>
-                <a:tint val="67000"/>
-              </a:schemeClr>
-            </a:gs>
-            <a:gs pos="50000">
-              <a:schemeClr val="phClr">
-                <a:lumMod val="105000"/>
-                <a:satMod val="103000"/>
-                <a:tint val="73000"/>
-              </a:schemeClr>
-            </a:gs>
-            <a:gs pos="100000">
-              <a:schemeClr val="phClr">
-                <a:lumMod val="105000"/>
-                <a:satMod val="109000"/>
-                <a:tint val="81000"/>
-              </a:schemeClr>
-            </a:gs>
-          </a:gsLst>
-          <a:lin ang="5400000" scaled="0"/>
-        </a:gradFill>
-        <a:gradFill rotWithShape="1">
-          <a:gsLst>
-            <a:gs pos="0">
-              <a:schemeClr val="phClr">
-                <a:satMod val="103000"/>
-                <a:lumMod val="102000"/>
-                <a:tint val="94000"/>
-              </a:schemeClr>
-            </a:gs>
-            <a:gs pos="50000">
-              <a:schemeClr val="phClr">
-                <a:satMod val="110000"/>
-                <a:lumMod val="100000"/>
-                <a:shade val="100000"/>
-              </a:schemeClr>
-            </a:gs>
-            <a:gs pos="100000">
-              <a:schemeClr val="phClr">
-                <a:lumMod val="99000"/>
-                <a:satMod val="120000"/>
-                <a:shade val="78000"/>
-              </a:schemeClr>
-            </a:gs>
-          </a:gsLst>
-          <a:lin ang="5400000" scaled="0"/>
-        </a:gradFill>
-      </a:fillStyleLst>
-      <a:lnStyleLst>
-        <a:ln w="12700" cap="flat" cmpd="sng" algn="ctr">
-          <a:solidFill>
-            <a:schemeClr val="phClr"/>
-          </a:solidFill>
-          <a:prstDash val="solid"/>
-          <a:miter lim="800000"/>
-        </a:ln>
-        <a:ln w="19050" cap="flat" cmpd="sng" algn="ctr">
-          <a:solidFill>
-            <a:schemeClr val="phClr"/>
-          </a:solidFill>
-          <a:prstDash val="solid"/>
-          <a:miter lim="800000"/>
-        </a:ln>
-        <a:ln w="25400" cap="flat" cmpd="sng" algn="ctr">
-          <a:solidFill>
-            <a:schemeClr val="phClr"/>
-          </a:solidFill>
-          <a:prstDash val="solid"/>
-          <a:miter lim="800000"/>
-        </a:ln>
-      </a:lnStyleLst>
-      <a:effectStyleLst>
-        <a:effectStyle>
-          <a:effectLst/>
-        </a:effectStyle>
-        <a:effectStyle>
-          <a:effectLst/>
-        </a:effectStyle>
-        <a:effectStyle>
-          <a:effectLst>
-            <a:outerShdw blurRad="57150" dist="19050" dir="5400000" algn="ctr" rotWithShape="0">
-              <a:srgbClr val="000000">
-                <a:alpha val="63000"/>
-              </a:srgbClr>
-            </a:outerShdw>
-          </a:effectLst>
-        </a:effectStyle>
-      </a:effectStyleLst>
-      <a:bgFillStyleLst>
-        <a:solidFill>
-          <a:schemeClr val="phClr"/>
-        </a:solidFill>
-        <a:solidFill>
-          <a:schemeClr val="phClr">
-            <a:tint val="95000"/>
-            <a:satMod val="170000"/>
-          </a:schemeClr>
-        </a:solidFill>
-        <a:gradFill rotWithShape="1">
-          <a:gsLst>
-            <a:gs pos="0">
-              <a:schemeClr val="phClr">
-                <a:tint val="93000"/>
-                <a:satMod val="150000"/>
-                <a:shade val="98000"/>
-                <a:lumMod val="102000"/>
-              </a:schemeClr>
-            </a:gs>
-            <a:gs pos="50000">
-              <a:schemeClr val="phClr">
-                <a:tint val="98000"/>
-                <a:satMod val="130000"/>
-                <a:shade val="90000"/>
-                <a:lumMod val="103000"/>
-              </a:schemeClr>
-            </a:gs>
-            <a:gs pos="100000">
-              <a:schemeClr val="phClr">
-                <a:shade val="63000"/>
-                <a:satMod val="120000"/>
-              </a:schemeClr>
-            </a:gs>
-          </a:gsLst>
-          <a:lin ang="5400000" scaled="0"/>
-        </a:gradFill>
-      </a:bgFillStyleLst>
-    </a:fmtScheme>
-  </a:themeElements>
-  <a:objectDefaults>
-    <a:lnDef>
-      <a:spPr/>
-      <a:bodyPr/>
-      <a:lstStyle/>
-      <a:style>
-        <a:lnRef idx="2">
-          <a:schemeClr val="accent1"/>
-        </a:lnRef>
-        <a:fillRef idx="0">
-          <a:schemeClr val="accent1"/>
-        </a:fillRef>
-        <a:effectRef idx="1">
-          <a:schemeClr val="accent1"/>
-        </a:effectRef>
-        <a:fontRef idx="minor">
-          <a:schemeClr val="tx1"/>
-        </a:fontRef>
-      </a:style>
-    </a:lnDef>
-  </a:objectDefaults>
-  <a:extraClrSchemeLst/>
-  <a:extLst>
-    <a:ext uri="{05A4C25C-085E-4340-85A3-A5531E510DB2}">
-      <thm15:themeFamily xmlns:thm15="http://schemas.microsoft.com/office/thememl/2012/main" name="Office Theme" id="{2E142A2C-CD16-42D6-873A-C26D2A0506FA}" vid="{1BDDFF52-6CD6-40A5-AB3C-68EB2F1E4D0A}"/>
-    </a:ext>
-  </a:extLst>
-</a:theme>
 </file>